--- a/docs/pptx/carbo/ritu-carbo-linsubhr-ratio-hosp7_10pct.pptx
+++ b/docs/pptx/carbo/ritu-carbo-linsubhr-ratio-hosp7_10pct.pptx
@@ -2443,7 +2443,7 @@
           </p:nvSpPr>
           <p:spPr>
             <a:xfrm>
-              <a:off x="973953" y="2073503"/>
+              <a:off x="974732" y="2073503"/>
               <a:ext cx="0" cy="3649639"/>
             </a:xfrm>
             <a:custGeom>
@@ -2486,7 +2486,7 @@
           </p:nvSpPr>
           <p:spPr>
             <a:xfrm>
-              <a:off x="1881787" y="2073503"/>
+              <a:off x="1882345" y="2073503"/>
               <a:ext cx="0" cy="3649639"/>
             </a:xfrm>
             <a:custGeom>
@@ -2529,7 +2529,7 @@
           </p:nvSpPr>
           <p:spPr>
             <a:xfrm>
-              <a:off x="2789620" y="2073503"/>
+              <a:off x="2789957" y="2073503"/>
               <a:ext cx="0" cy="3649639"/>
             </a:xfrm>
             <a:custGeom>
@@ -2572,7 +2572,7 @@
           </p:nvSpPr>
           <p:spPr>
             <a:xfrm>
-              <a:off x="3697454" y="2073503"/>
+              <a:off x="3697570" y="2073503"/>
               <a:ext cx="0" cy="3649639"/>
             </a:xfrm>
             <a:custGeom>
@@ -2615,7 +2615,7 @@
           </p:nvSpPr>
           <p:spPr>
             <a:xfrm>
-              <a:off x="4605287" y="2073503"/>
+              <a:off x="4605182" y="2073503"/>
               <a:ext cx="0" cy="3649639"/>
             </a:xfrm>
             <a:custGeom>
@@ -2658,7 +2658,7 @@
           </p:nvSpPr>
           <p:spPr>
             <a:xfrm>
-              <a:off x="5513120" y="2073503"/>
+              <a:off x="5512795" y="2073503"/>
               <a:ext cx="0" cy="3649639"/>
             </a:xfrm>
             <a:custGeom>
@@ -2701,7 +2701,7 @@
           </p:nvSpPr>
           <p:spPr>
             <a:xfrm>
-              <a:off x="6420954" y="2073503"/>
+              <a:off x="6420407" y="2073503"/>
               <a:ext cx="0" cy="3649639"/>
             </a:xfrm>
             <a:custGeom>
@@ -2744,7 +2744,7 @@
           </p:nvSpPr>
           <p:spPr>
             <a:xfrm>
-              <a:off x="7328787" y="2073503"/>
+              <a:off x="7328020" y="2073503"/>
               <a:ext cx="0" cy="3649639"/>
             </a:xfrm>
             <a:custGeom>
@@ -2787,7 +2787,7 @@
           </p:nvSpPr>
           <p:spPr>
             <a:xfrm>
-              <a:off x="8236620" y="2073503"/>
+              <a:off x="8235632" y="2073503"/>
               <a:ext cx="0" cy="3649639"/>
             </a:xfrm>
             <a:custGeom>
@@ -3045,7 +3045,7 @@
           </p:nvSpPr>
           <p:spPr>
             <a:xfrm>
-              <a:off x="1427870" y="2073503"/>
+              <a:off x="1428538" y="2073503"/>
               <a:ext cx="0" cy="3649639"/>
             </a:xfrm>
             <a:custGeom>
@@ -3088,7 +3088,7 @@
           </p:nvSpPr>
           <p:spPr>
             <a:xfrm>
-              <a:off x="2335703" y="2073503"/>
+              <a:off x="2336151" y="2073503"/>
               <a:ext cx="0" cy="3649639"/>
             </a:xfrm>
             <a:custGeom>
@@ -3131,7 +3131,7 @@
           </p:nvSpPr>
           <p:spPr>
             <a:xfrm>
-              <a:off x="3243537" y="2073503"/>
+              <a:off x="3243764" y="2073503"/>
               <a:ext cx="0" cy="3649639"/>
             </a:xfrm>
             <a:custGeom>
@@ -3174,7 +3174,7 @@
           </p:nvSpPr>
           <p:spPr>
             <a:xfrm>
-              <a:off x="4151370" y="2073503"/>
+              <a:off x="4151376" y="2073503"/>
               <a:ext cx="0" cy="3649639"/>
             </a:xfrm>
             <a:custGeom>
@@ -3217,7 +3217,7 @@
           </p:nvSpPr>
           <p:spPr>
             <a:xfrm>
-              <a:off x="5059204" y="2073503"/>
+              <a:off x="5058989" y="2073503"/>
               <a:ext cx="0" cy="3649639"/>
             </a:xfrm>
             <a:custGeom>
@@ -3260,7 +3260,7 @@
           </p:nvSpPr>
           <p:spPr>
             <a:xfrm>
-              <a:off x="5967037" y="2073503"/>
+              <a:off x="5966601" y="2073503"/>
               <a:ext cx="0" cy="3649639"/>
             </a:xfrm>
             <a:custGeom>
@@ -3303,7 +3303,7 @@
           </p:nvSpPr>
           <p:spPr>
             <a:xfrm>
-              <a:off x="6874870" y="2073503"/>
+              <a:off x="6874214" y="2073503"/>
               <a:ext cx="0" cy="3649639"/>
             </a:xfrm>
             <a:custGeom>
@@ -3346,7 +3346,7 @@
           </p:nvSpPr>
           <p:spPr>
             <a:xfrm>
-              <a:off x="7782704" y="2073503"/>
+              <a:off x="7781826" y="2073503"/>
               <a:ext cx="0" cy="3649639"/>
             </a:xfrm>
             <a:custGeom>
@@ -3390,533 +3390,530 @@
           <p:spPr>
             <a:xfrm>
               <a:off x="1172049" y="2073503"/>
-              <a:ext cx="7090630" cy="3457780"/>
+              <a:ext cx="7090630" cy="3457250"/>
             </a:xfrm>
             <a:custGeom>
               <a:avLst/>
               <a:pathLst>
-                <a:path w="7090630" h="3457780">
+                <a:path w="7090630" h="3457250">
                   <a:moveTo>
-                    <a:pt x="1422011" y="0"/>
+                    <a:pt x="1446837" y="0"/>
                   </a:moveTo>
                   <a:lnTo>
-                    <a:pt x="1432450" y="32122"/>
-                  </a:lnTo>
-                  <a:lnTo>
-                    <a:pt x="1504073" y="239287"/>
-                  </a:lnTo>
-                  <a:lnTo>
-                    <a:pt x="1575695" y="434018"/>
-                  </a:lnTo>
-                  <a:lnTo>
-                    <a:pt x="1647318" y="617062"/>
-                  </a:lnTo>
-                  <a:lnTo>
-                    <a:pt x="1718940" y="789119"/>
-                  </a:lnTo>
-                  <a:lnTo>
-                    <a:pt x="1790563" y="950849"/>
-                  </a:lnTo>
-                  <a:lnTo>
-                    <a:pt x="1862185" y="1102873"/>
-                  </a:lnTo>
-                  <a:lnTo>
-                    <a:pt x="1933808" y="1245772"/>
-                  </a:lnTo>
-                  <a:lnTo>
-                    <a:pt x="2005430" y="1380094"/>
-                  </a:lnTo>
-                  <a:lnTo>
-                    <a:pt x="2077053" y="1506355"/>
-                  </a:lnTo>
-                  <a:lnTo>
-                    <a:pt x="2148675" y="1625037"/>
-                  </a:lnTo>
-                  <a:lnTo>
-                    <a:pt x="2220298" y="1736596"/>
-                  </a:lnTo>
-                  <a:lnTo>
-                    <a:pt x="2291920" y="1841459"/>
-                  </a:lnTo>
-                  <a:lnTo>
-                    <a:pt x="2363543" y="1940028"/>
-                  </a:lnTo>
-                  <a:lnTo>
-                    <a:pt x="2435165" y="2032682"/>
-                  </a:lnTo>
-                  <a:lnTo>
-                    <a:pt x="2506788" y="2119774"/>
-                  </a:lnTo>
-                  <a:lnTo>
-                    <a:pt x="2578410" y="2201639"/>
-                  </a:lnTo>
-                  <a:lnTo>
-                    <a:pt x="2650033" y="2278591"/>
-                  </a:lnTo>
-                  <a:lnTo>
-                    <a:pt x="2721655" y="2350924"/>
-                  </a:lnTo>
-                  <a:lnTo>
-                    <a:pt x="2793278" y="2418915"/>
-                  </a:lnTo>
-                  <a:lnTo>
-                    <a:pt x="2864901" y="2482826"/>
-                  </a:lnTo>
-                  <a:lnTo>
-                    <a:pt x="2936523" y="2542901"/>
-                  </a:lnTo>
-                  <a:lnTo>
-                    <a:pt x="3008146" y="2599370"/>
-                  </a:lnTo>
-                  <a:lnTo>
-                    <a:pt x="3079768" y="2652450"/>
-                  </a:lnTo>
-                  <a:lnTo>
-                    <a:pt x="3151391" y="2629731"/>
-                  </a:lnTo>
-                  <a:lnTo>
-                    <a:pt x="3223013" y="2603503"/>
-                  </a:lnTo>
-                  <a:lnTo>
-                    <a:pt x="3294636" y="2576469"/>
-                  </a:lnTo>
-                  <a:lnTo>
-                    <a:pt x="3366258" y="2548605"/>
-                  </a:lnTo>
-                  <a:lnTo>
-                    <a:pt x="3437881" y="2519886"/>
-                  </a:lnTo>
-                  <a:lnTo>
-                    <a:pt x="3509503" y="2490284"/>
-                  </a:lnTo>
-                  <a:lnTo>
-                    <a:pt x="3581126" y="2459773"/>
-                  </a:lnTo>
-                  <a:lnTo>
-                    <a:pt x="3652748" y="2428326"/>
-                  </a:lnTo>
-                  <a:lnTo>
-                    <a:pt x="3724371" y="2395912"/>
-                  </a:lnTo>
-                  <a:lnTo>
-                    <a:pt x="3795993" y="2362503"/>
-                  </a:lnTo>
-                  <a:lnTo>
-                    <a:pt x="3867616" y="2328068"/>
-                  </a:lnTo>
-                  <a:lnTo>
-                    <a:pt x="3939238" y="2292575"/>
-                  </a:lnTo>
-                  <a:lnTo>
-                    <a:pt x="4010861" y="2255993"/>
-                  </a:lnTo>
-                  <a:lnTo>
-                    <a:pt x="4082483" y="2218287"/>
-                  </a:lnTo>
-                  <a:lnTo>
-                    <a:pt x="4154106" y="2179423"/>
-                  </a:lnTo>
-                  <a:lnTo>
-                    <a:pt x="4225729" y="2139365"/>
-                  </a:lnTo>
-                  <a:lnTo>
-                    <a:pt x="4297351" y="2098077"/>
-                  </a:lnTo>
-                  <a:lnTo>
-                    <a:pt x="4368974" y="2055521"/>
-                  </a:lnTo>
-                  <a:lnTo>
-                    <a:pt x="4440596" y="2011658"/>
-                  </a:lnTo>
-                  <a:lnTo>
-                    <a:pt x="4512219" y="1966448"/>
-                  </a:lnTo>
-                  <a:lnTo>
-                    <a:pt x="4583841" y="1919850"/>
-                  </a:lnTo>
-                  <a:lnTo>
-                    <a:pt x="4655464" y="1871820"/>
-                  </a:lnTo>
-                  <a:lnTo>
-                    <a:pt x="4727086" y="1822316"/>
-                  </a:lnTo>
-                  <a:lnTo>
-                    <a:pt x="4798709" y="1771291"/>
-                  </a:lnTo>
-                  <a:lnTo>
-                    <a:pt x="4870331" y="1718699"/>
-                  </a:lnTo>
-                  <a:lnTo>
-                    <a:pt x="4941954" y="1664491"/>
-                  </a:lnTo>
-                  <a:lnTo>
-                    <a:pt x="5013576" y="1608619"/>
-                  </a:lnTo>
-                  <a:lnTo>
-                    <a:pt x="5085199" y="1551032"/>
-                  </a:lnTo>
-                  <a:lnTo>
-                    <a:pt x="5156821" y="1491675"/>
-                  </a:lnTo>
-                  <a:lnTo>
-                    <a:pt x="5228444" y="1430496"/>
-                  </a:lnTo>
-                  <a:lnTo>
-                    <a:pt x="5300066" y="1367437"/>
-                  </a:lnTo>
-                  <a:lnTo>
-                    <a:pt x="5371689" y="1302442"/>
-                  </a:lnTo>
-                  <a:lnTo>
-                    <a:pt x="5443311" y="1235451"/>
-                  </a:lnTo>
-                  <a:lnTo>
-                    <a:pt x="5514934" y="1166403"/>
-                  </a:lnTo>
-                  <a:lnTo>
-                    <a:pt x="5586557" y="1095234"/>
-                  </a:lnTo>
-                  <a:lnTo>
-                    <a:pt x="5658179" y="1021879"/>
-                  </a:lnTo>
-                  <a:lnTo>
-                    <a:pt x="5729802" y="946272"/>
-                  </a:lnTo>
-                  <a:lnTo>
-                    <a:pt x="5801424" y="868342"/>
-                  </a:lnTo>
-                  <a:lnTo>
-                    <a:pt x="5873047" y="788019"/>
-                  </a:lnTo>
-                  <a:lnTo>
-                    <a:pt x="5944669" y="705229"/>
-                  </a:lnTo>
-                  <a:lnTo>
-                    <a:pt x="6016292" y="619897"/>
-                  </a:lnTo>
-                  <a:lnTo>
-                    <a:pt x="6087914" y="531944"/>
-                  </a:lnTo>
-                  <a:lnTo>
-                    <a:pt x="6159537" y="441290"/>
-                  </a:lnTo>
-                  <a:lnTo>
-                    <a:pt x="6231159" y="347852"/>
-                  </a:lnTo>
-                  <a:lnTo>
-                    <a:pt x="6302782" y="251544"/>
-                  </a:lnTo>
-                  <a:lnTo>
-                    <a:pt x="6374404" y="152278"/>
-                  </a:lnTo>
-                  <a:lnTo>
-                    <a:pt x="6446027" y="49964"/>
-                  </a:lnTo>
-                  <a:lnTo>
-                    <a:pt x="6479961" y="0"/>
+                    <a:pt x="1504073" y="169172"/>
+                  </a:lnTo>
+                  <a:lnTo>
+                    <a:pt x="1575695" y="368158"/>
+                  </a:lnTo>
+                  <a:lnTo>
+                    <a:pt x="1647318" y="555198"/>
+                  </a:lnTo>
+                  <a:lnTo>
+                    <a:pt x="1718940" y="731010"/>
+                  </a:lnTo>
+                  <a:lnTo>
+                    <a:pt x="1790563" y="896267"/>
+                  </a:lnTo>
+                  <a:lnTo>
+                    <a:pt x="1862185" y="1051603"/>
+                  </a:lnTo>
+                  <a:lnTo>
+                    <a:pt x="1933808" y="1197614"/>
+                  </a:lnTo>
+                  <a:lnTo>
+                    <a:pt x="2005430" y="1334859"/>
+                  </a:lnTo>
+                  <a:lnTo>
+                    <a:pt x="2077053" y="1463865"/>
+                  </a:lnTo>
+                  <a:lnTo>
+                    <a:pt x="2148675" y="1585126"/>
+                  </a:lnTo>
+                  <a:lnTo>
+                    <a:pt x="2220298" y="1699107"/>
+                  </a:lnTo>
+                  <a:lnTo>
+                    <a:pt x="2291920" y="1806246"/>
+                  </a:lnTo>
+                  <a:lnTo>
+                    <a:pt x="2363543" y="1906952"/>
+                  </a:lnTo>
+                  <a:lnTo>
+                    <a:pt x="2435165" y="2001613"/>
+                  </a:lnTo>
+                  <a:lnTo>
+                    <a:pt x="2506788" y="2090591"/>
+                  </a:lnTo>
+                  <a:lnTo>
+                    <a:pt x="2578410" y="2174228"/>
+                  </a:lnTo>
+                  <a:lnTo>
+                    <a:pt x="2650033" y="2252843"/>
+                  </a:lnTo>
+                  <a:lnTo>
+                    <a:pt x="2721655" y="2326739"/>
+                  </a:lnTo>
+                  <a:lnTo>
+                    <a:pt x="2793278" y="2396198"/>
+                  </a:lnTo>
+                  <a:lnTo>
+                    <a:pt x="2864901" y="2461488"/>
+                  </a:lnTo>
+                  <a:lnTo>
+                    <a:pt x="2936523" y="2522858"/>
+                  </a:lnTo>
+                  <a:lnTo>
+                    <a:pt x="3008146" y="2580544"/>
+                  </a:lnTo>
+                  <a:lnTo>
+                    <a:pt x="3079768" y="2634766"/>
+                  </a:lnTo>
+                  <a:lnTo>
+                    <a:pt x="3151391" y="2638465"/>
+                  </a:lnTo>
+                  <a:lnTo>
+                    <a:pt x="3223013" y="2612498"/>
+                  </a:lnTo>
+                  <a:lnTo>
+                    <a:pt x="3294636" y="2585734"/>
+                  </a:lnTo>
+                  <a:lnTo>
+                    <a:pt x="3366258" y="2558148"/>
+                  </a:lnTo>
+                  <a:lnTo>
+                    <a:pt x="3437881" y="2529715"/>
+                  </a:lnTo>
+                  <a:lnTo>
+                    <a:pt x="3509503" y="2500408"/>
+                  </a:lnTo>
+                  <a:lnTo>
+                    <a:pt x="3581126" y="2470201"/>
+                  </a:lnTo>
+                  <a:lnTo>
+                    <a:pt x="3652748" y="2439066"/>
+                  </a:lnTo>
+                  <a:lnTo>
+                    <a:pt x="3724371" y="2406974"/>
+                  </a:lnTo>
+                  <a:lnTo>
+                    <a:pt x="3795993" y="2373897"/>
+                  </a:lnTo>
+                  <a:lnTo>
+                    <a:pt x="3867616" y="2339803"/>
+                  </a:lnTo>
+                  <a:lnTo>
+                    <a:pt x="3939238" y="2304662"/>
+                  </a:lnTo>
+                  <a:lnTo>
+                    <a:pt x="4010861" y="2268442"/>
+                  </a:lnTo>
+                  <a:lnTo>
+                    <a:pt x="4082483" y="2231109"/>
+                  </a:lnTo>
+                  <a:lnTo>
+                    <a:pt x="4154106" y="2192629"/>
+                  </a:lnTo>
+                  <a:lnTo>
+                    <a:pt x="4225729" y="2152967"/>
+                  </a:lnTo>
+                  <a:lnTo>
+                    <a:pt x="4297351" y="2112087"/>
+                  </a:lnTo>
+                  <a:lnTo>
+                    <a:pt x="4368974" y="2069951"/>
+                  </a:lnTo>
+                  <a:lnTo>
+                    <a:pt x="4440596" y="2026520"/>
+                  </a:lnTo>
+                  <a:lnTo>
+                    <a:pt x="4512219" y="1981756"/>
+                  </a:lnTo>
+                  <a:lnTo>
+                    <a:pt x="4583841" y="1935616"/>
+                  </a:lnTo>
+                  <a:lnTo>
+                    <a:pt x="4655464" y="1888059"/>
+                  </a:lnTo>
+                  <a:lnTo>
+                    <a:pt x="4727086" y="1839041"/>
+                  </a:lnTo>
+                  <a:lnTo>
+                    <a:pt x="4798709" y="1788517"/>
+                  </a:lnTo>
+                  <a:lnTo>
+                    <a:pt x="4870331" y="1736441"/>
+                  </a:lnTo>
+                  <a:lnTo>
+                    <a:pt x="4941954" y="1682766"/>
+                  </a:lnTo>
+                  <a:lnTo>
+                    <a:pt x="5013576" y="1627442"/>
+                  </a:lnTo>
+                  <a:lnTo>
+                    <a:pt x="5085199" y="1570418"/>
+                  </a:lnTo>
+                  <a:lnTo>
+                    <a:pt x="5156821" y="1511642"/>
+                  </a:lnTo>
+                  <a:lnTo>
+                    <a:pt x="5228444" y="1451061"/>
+                  </a:lnTo>
+                  <a:lnTo>
+                    <a:pt x="5300066" y="1388619"/>
+                  </a:lnTo>
+                  <a:lnTo>
+                    <a:pt x="5371689" y="1324258"/>
+                  </a:lnTo>
+                  <a:lnTo>
+                    <a:pt x="5443311" y="1257921"/>
+                  </a:lnTo>
+                  <a:lnTo>
+                    <a:pt x="5514934" y="1189546"/>
+                  </a:lnTo>
+                  <a:lnTo>
+                    <a:pt x="5586557" y="1119070"/>
+                  </a:lnTo>
+                  <a:lnTo>
+                    <a:pt x="5658179" y="1046429"/>
+                  </a:lnTo>
+                  <a:lnTo>
+                    <a:pt x="5729802" y="971557"/>
+                  </a:lnTo>
+                  <a:lnTo>
+                    <a:pt x="5801424" y="894385"/>
+                  </a:lnTo>
+                  <a:lnTo>
+                    <a:pt x="5873047" y="814843"/>
+                  </a:lnTo>
+                  <a:lnTo>
+                    <a:pt x="5944669" y="732857"/>
+                  </a:lnTo>
+                  <a:lnTo>
+                    <a:pt x="6016292" y="648352"/>
+                  </a:lnTo>
+                  <a:lnTo>
+                    <a:pt x="6087914" y="561251"/>
+                  </a:lnTo>
+                  <a:lnTo>
+                    <a:pt x="6159537" y="471475"/>
+                  </a:lnTo>
+                  <a:lnTo>
+                    <a:pt x="6231159" y="378941"/>
+                  </a:lnTo>
+                  <a:lnTo>
+                    <a:pt x="6302782" y="283564"/>
+                  </a:lnTo>
+                  <a:lnTo>
+                    <a:pt x="6374404" y="185258"/>
+                  </a:lnTo>
+                  <a:lnTo>
+                    <a:pt x="6446027" y="83931"/>
+                  </a:lnTo>
+                  <a:lnTo>
+                    <a:pt x="6503586" y="0"/>
                   </a:lnTo>
                   <a:lnTo>
                     <a:pt x="7090630" y="0"/>
                   </a:lnTo>
                   <a:lnTo>
-                    <a:pt x="7090630" y="3457780"/>
-                  </a:lnTo>
-                  <a:lnTo>
-                    <a:pt x="7019007" y="3456122"/>
-                  </a:lnTo>
-                  <a:lnTo>
-                    <a:pt x="6947385" y="3454358"/>
-                  </a:lnTo>
-                  <a:lnTo>
-                    <a:pt x="6875762" y="3452482"/>
-                  </a:lnTo>
-                  <a:lnTo>
-                    <a:pt x="6804139" y="3450486"/>
-                  </a:lnTo>
-                  <a:lnTo>
-                    <a:pt x="6732517" y="3448362"/>
-                  </a:lnTo>
-                  <a:lnTo>
-                    <a:pt x="6660894" y="3446102"/>
-                  </a:lnTo>
-                  <a:lnTo>
-                    <a:pt x="6589272" y="3443699"/>
-                  </a:lnTo>
-                  <a:lnTo>
-                    <a:pt x="6517649" y="3441142"/>
-                  </a:lnTo>
-                  <a:lnTo>
-                    <a:pt x="6446027" y="3438421"/>
-                  </a:lnTo>
-                  <a:lnTo>
-                    <a:pt x="6374404" y="3435527"/>
-                  </a:lnTo>
-                  <a:lnTo>
-                    <a:pt x="6302782" y="3432448"/>
-                  </a:lnTo>
-                  <a:lnTo>
-                    <a:pt x="6231159" y="3429173"/>
-                  </a:lnTo>
-                  <a:lnTo>
-                    <a:pt x="6159537" y="3425688"/>
-                  </a:lnTo>
-                  <a:lnTo>
-                    <a:pt x="6087914" y="3421981"/>
-                  </a:lnTo>
-                  <a:lnTo>
-                    <a:pt x="6016292" y="3418037"/>
-                  </a:lnTo>
-                  <a:lnTo>
-                    <a:pt x="5944669" y="3413841"/>
-                  </a:lnTo>
-                  <a:lnTo>
-                    <a:pt x="5873047" y="3409378"/>
-                  </a:lnTo>
-                  <a:lnTo>
-                    <a:pt x="5801424" y="3404629"/>
-                  </a:lnTo>
-                  <a:lnTo>
-                    <a:pt x="5729802" y="3399578"/>
-                  </a:lnTo>
-                  <a:lnTo>
-                    <a:pt x="5658179" y="3394203"/>
-                  </a:lnTo>
-                  <a:lnTo>
-                    <a:pt x="5586557" y="3388486"/>
-                  </a:lnTo>
-                  <a:lnTo>
-                    <a:pt x="5514934" y="3382403"/>
-                  </a:lnTo>
-                  <a:lnTo>
-                    <a:pt x="5443311" y="3375932"/>
-                  </a:lnTo>
-                  <a:lnTo>
-                    <a:pt x="5371689" y="3369048"/>
-                  </a:lnTo>
-                  <a:lnTo>
-                    <a:pt x="5300066" y="3361724"/>
-                  </a:lnTo>
-                  <a:lnTo>
-                    <a:pt x="5228444" y="3353933"/>
-                  </a:lnTo>
-                  <a:lnTo>
-                    <a:pt x="5156821" y="3345644"/>
-                  </a:lnTo>
-                  <a:lnTo>
-                    <a:pt x="5085199" y="3336826"/>
-                  </a:lnTo>
-                  <a:lnTo>
-                    <a:pt x="5013576" y="3327445"/>
-                  </a:lnTo>
-                  <a:lnTo>
-                    <a:pt x="4941954" y="3317465"/>
-                  </a:lnTo>
-                  <a:lnTo>
-                    <a:pt x="4870331" y="3306847"/>
-                  </a:lnTo>
-                  <a:lnTo>
-                    <a:pt x="4798709" y="3295552"/>
-                  </a:lnTo>
-                  <a:lnTo>
-                    <a:pt x="4727086" y="3283535"/>
-                  </a:lnTo>
-                  <a:lnTo>
-                    <a:pt x="4655464" y="3270751"/>
-                  </a:lnTo>
-                  <a:lnTo>
-                    <a:pt x="4583841" y="3257151"/>
-                  </a:lnTo>
-                  <a:lnTo>
-                    <a:pt x="4512219" y="3242683"/>
-                  </a:lnTo>
-                  <a:lnTo>
-                    <a:pt x="4440596" y="3227290"/>
-                  </a:lnTo>
-                  <a:lnTo>
-                    <a:pt x="4368974" y="3210915"/>
-                  </a:lnTo>
-                  <a:lnTo>
-                    <a:pt x="4297351" y="3193494"/>
-                  </a:lnTo>
-                  <a:lnTo>
-                    <a:pt x="4225729" y="3174961"/>
-                  </a:lnTo>
-                  <a:lnTo>
-                    <a:pt x="4154106" y="3155244"/>
-                  </a:lnTo>
-                  <a:lnTo>
-                    <a:pt x="4082483" y="3134269"/>
-                  </a:lnTo>
-                  <a:lnTo>
-                    <a:pt x="4010861" y="3111954"/>
-                  </a:lnTo>
-                  <a:lnTo>
-                    <a:pt x="3939238" y="3088214"/>
-                  </a:lnTo>
-                  <a:lnTo>
-                    <a:pt x="3867616" y="3062959"/>
-                  </a:lnTo>
-                  <a:lnTo>
-                    <a:pt x="3795993" y="3036091"/>
-                  </a:lnTo>
-                  <a:lnTo>
-                    <a:pt x="3724371" y="3007507"/>
-                  </a:lnTo>
-                  <a:lnTo>
-                    <a:pt x="3652748" y="2977098"/>
-                  </a:lnTo>
-                  <a:lnTo>
-                    <a:pt x="3581126" y="2944748"/>
-                  </a:lnTo>
-                  <a:lnTo>
-                    <a:pt x="3509503" y="2910332"/>
-                  </a:lnTo>
-                  <a:lnTo>
-                    <a:pt x="3437881" y="2873718"/>
-                  </a:lnTo>
-                  <a:lnTo>
-                    <a:pt x="3366258" y="2834767"/>
-                  </a:lnTo>
-                  <a:lnTo>
-                    <a:pt x="3294636" y="2793328"/>
-                  </a:lnTo>
-                  <a:lnTo>
-                    <a:pt x="3223013" y="2749243"/>
-                  </a:lnTo>
-                  <a:lnTo>
-                    <a:pt x="3151391" y="2702344"/>
-                  </a:lnTo>
-                  <a:lnTo>
-                    <a:pt x="3079768" y="2655177"/>
-                  </a:lnTo>
-                  <a:lnTo>
-                    <a:pt x="3008146" y="2679866"/>
-                  </a:lnTo>
-                  <a:lnTo>
-                    <a:pt x="2936523" y="2703818"/>
-                  </a:lnTo>
-                  <a:lnTo>
-                    <a:pt x="2864901" y="2727057"/>
-                  </a:lnTo>
-                  <a:lnTo>
-                    <a:pt x="2793278" y="2749604"/>
-                  </a:lnTo>
-                  <a:lnTo>
-                    <a:pt x="2721655" y="2771479"/>
-                  </a:lnTo>
-                  <a:lnTo>
-                    <a:pt x="2650033" y="2792702"/>
-                  </a:lnTo>
-                  <a:lnTo>
-                    <a:pt x="2578410" y="2813292"/>
-                  </a:lnTo>
-                  <a:lnTo>
-                    <a:pt x="2506788" y="2833269"/>
-                  </a:lnTo>
-                  <a:lnTo>
-                    <a:pt x="2435165" y="2852651"/>
-                  </a:lnTo>
-                  <a:lnTo>
-                    <a:pt x="2363543" y="2871456"/>
-                  </a:lnTo>
-                  <a:lnTo>
-                    <a:pt x="2291920" y="2889700"/>
-                  </a:lnTo>
-                  <a:lnTo>
-                    <a:pt x="2220298" y="2907400"/>
-                  </a:lnTo>
-                  <a:lnTo>
-                    <a:pt x="2148675" y="2924573"/>
-                  </a:lnTo>
-                  <a:lnTo>
-                    <a:pt x="2077053" y="2941234"/>
-                  </a:lnTo>
-                  <a:lnTo>
-                    <a:pt x="2005430" y="2957399"/>
-                  </a:lnTo>
-                  <a:lnTo>
-                    <a:pt x="1933808" y="2973083"/>
-                  </a:lnTo>
-                  <a:lnTo>
-                    <a:pt x="1862185" y="2988299"/>
-                  </a:lnTo>
-                  <a:lnTo>
-                    <a:pt x="1790563" y="3003061"/>
-                  </a:lnTo>
-                  <a:lnTo>
-                    <a:pt x="1718940" y="3017384"/>
-                  </a:lnTo>
-                  <a:lnTo>
-                    <a:pt x="1647318" y="3031280"/>
-                  </a:lnTo>
-                  <a:lnTo>
-                    <a:pt x="1575695" y="3044762"/>
-                  </a:lnTo>
-                  <a:lnTo>
-                    <a:pt x="1504073" y="3057842"/>
-                  </a:lnTo>
-                  <a:lnTo>
-                    <a:pt x="1432450" y="3070532"/>
-                  </a:lnTo>
-                  <a:lnTo>
-                    <a:pt x="1360827" y="3082844"/>
-                  </a:lnTo>
-                  <a:lnTo>
-                    <a:pt x="1289205" y="3094790"/>
-                  </a:lnTo>
-                  <a:lnTo>
-                    <a:pt x="1217582" y="3106379"/>
-                  </a:lnTo>
-                  <a:lnTo>
-                    <a:pt x="1145960" y="3117623"/>
-                  </a:lnTo>
-                  <a:lnTo>
-                    <a:pt x="1074337" y="3128533"/>
-                  </a:lnTo>
-                  <a:lnTo>
-                    <a:pt x="1002715" y="3139117"/>
-                  </a:lnTo>
-                  <a:lnTo>
-                    <a:pt x="931092" y="3149385"/>
-                  </a:lnTo>
-                  <a:lnTo>
-                    <a:pt x="859470" y="3159348"/>
-                  </a:lnTo>
-                  <a:lnTo>
-                    <a:pt x="787847" y="3169014"/>
-                  </a:lnTo>
-                  <a:lnTo>
-                    <a:pt x="716225" y="3178392"/>
-                  </a:lnTo>
-                  <a:lnTo>
-                    <a:pt x="644602" y="3187490"/>
-                  </a:lnTo>
-                  <a:lnTo>
-                    <a:pt x="572980" y="3196318"/>
-                  </a:lnTo>
-                  <a:lnTo>
-                    <a:pt x="501357" y="3204882"/>
-                  </a:lnTo>
-                  <a:lnTo>
-                    <a:pt x="429735" y="3213191"/>
-                  </a:lnTo>
-                  <a:lnTo>
-                    <a:pt x="358112" y="3221253"/>
-                  </a:lnTo>
-                  <a:lnTo>
-                    <a:pt x="286490" y="3229074"/>
-                  </a:lnTo>
-                  <a:lnTo>
-                    <a:pt x="214867" y="3236662"/>
-                  </a:lnTo>
-                  <a:lnTo>
-                    <a:pt x="143245" y="3244025"/>
-                  </a:lnTo>
-                  <a:lnTo>
-                    <a:pt x="71622" y="3251167"/>
-                  </a:lnTo>
-                  <a:lnTo>
-                    <a:pt x="0" y="3258098"/>
+                    <a:pt x="7090630" y="3457250"/>
+                  </a:lnTo>
+                  <a:lnTo>
+                    <a:pt x="7019007" y="3455558"/>
+                  </a:lnTo>
+                  <a:lnTo>
+                    <a:pt x="6947385" y="3453758"/>
+                  </a:lnTo>
+                  <a:lnTo>
+                    <a:pt x="6875762" y="3451842"/>
+                  </a:lnTo>
+                  <a:lnTo>
+                    <a:pt x="6804139" y="3449805"/>
+                  </a:lnTo>
+                  <a:lnTo>
+                    <a:pt x="6732517" y="3447637"/>
+                  </a:lnTo>
+                  <a:lnTo>
+                    <a:pt x="6660894" y="3445331"/>
+                  </a:lnTo>
+                  <a:lnTo>
+                    <a:pt x="6589272" y="3442877"/>
+                  </a:lnTo>
+                  <a:lnTo>
+                    <a:pt x="6517649" y="3440267"/>
+                  </a:lnTo>
+                  <a:lnTo>
+                    <a:pt x="6446027" y="3437490"/>
+                  </a:lnTo>
+                  <a:lnTo>
+                    <a:pt x="6374404" y="3434535"/>
+                  </a:lnTo>
+                  <a:lnTo>
+                    <a:pt x="6302782" y="3431392"/>
+                  </a:lnTo>
+                  <a:lnTo>
+                    <a:pt x="6231159" y="3428049"/>
+                  </a:lnTo>
+                  <a:lnTo>
+                    <a:pt x="6159537" y="3424491"/>
+                  </a:lnTo>
+                  <a:lnTo>
+                    <a:pt x="6087914" y="3420707"/>
+                  </a:lnTo>
+                  <a:lnTo>
+                    <a:pt x="6016292" y="3416681"/>
+                  </a:lnTo>
+                  <a:lnTo>
+                    <a:pt x="5944669" y="3412397"/>
+                  </a:lnTo>
+                  <a:lnTo>
+                    <a:pt x="5873047" y="3407840"/>
+                  </a:lnTo>
+                  <a:lnTo>
+                    <a:pt x="5801424" y="3402992"/>
+                  </a:lnTo>
+                  <a:lnTo>
+                    <a:pt x="5729802" y="3397835"/>
+                  </a:lnTo>
+                  <a:lnTo>
+                    <a:pt x="5658179" y="3392348"/>
+                  </a:lnTo>
+                  <a:lnTo>
+                    <a:pt x="5586557" y="3386510"/>
+                  </a:lnTo>
+                  <a:lnTo>
+                    <a:pt x="5514934" y="3380300"/>
+                  </a:lnTo>
+                  <a:lnTo>
+                    <a:pt x="5443311" y="3373693"/>
+                  </a:lnTo>
+                  <a:lnTo>
+                    <a:pt x="5371689" y="3366664"/>
+                  </a:lnTo>
+                  <a:lnTo>
+                    <a:pt x="5300066" y="3359187"/>
+                  </a:lnTo>
+                  <a:lnTo>
+                    <a:pt x="5228444" y="3351231"/>
+                  </a:lnTo>
+                  <a:lnTo>
+                    <a:pt x="5156821" y="3342768"/>
+                  </a:lnTo>
+                  <a:lnTo>
+                    <a:pt x="5085199" y="3333764"/>
+                  </a:lnTo>
+                  <a:lnTo>
+                    <a:pt x="5013576" y="3324185"/>
+                  </a:lnTo>
+                  <a:lnTo>
+                    <a:pt x="4941954" y="3313994"/>
+                  </a:lnTo>
+                  <a:lnTo>
+                    <a:pt x="4870331" y="3303152"/>
+                  </a:lnTo>
+                  <a:lnTo>
+                    <a:pt x="4798709" y="3291618"/>
+                  </a:lnTo>
+                  <a:lnTo>
+                    <a:pt x="4727086" y="3279347"/>
+                  </a:lnTo>
+                  <a:lnTo>
+                    <a:pt x="4655464" y="3266292"/>
+                  </a:lnTo>
+                  <a:lnTo>
+                    <a:pt x="4583841" y="3252404"/>
+                  </a:lnTo>
+                  <a:lnTo>
+                    <a:pt x="4512219" y="3237629"/>
+                  </a:lnTo>
+                  <a:lnTo>
+                    <a:pt x="4440596" y="3221910"/>
+                  </a:lnTo>
+                  <a:lnTo>
+                    <a:pt x="4368974" y="3205187"/>
+                  </a:lnTo>
+                  <a:lnTo>
+                    <a:pt x="4297351" y="3187396"/>
+                  </a:lnTo>
+                  <a:lnTo>
+                    <a:pt x="4225729" y="3168468"/>
+                  </a:lnTo>
+                  <a:lnTo>
+                    <a:pt x="4154106" y="3148332"/>
+                  </a:lnTo>
+                  <a:lnTo>
+                    <a:pt x="4082483" y="3126910"/>
+                  </a:lnTo>
+                  <a:lnTo>
+                    <a:pt x="4010861" y="3104119"/>
+                  </a:lnTo>
+                  <a:lnTo>
+                    <a:pt x="3939238" y="3079873"/>
+                  </a:lnTo>
+                  <a:lnTo>
+                    <a:pt x="3867616" y="3054079"/>
+                  </a:lnTo>
+                  <a:lnTo>
+                    <a:pt x="3795993" y="3026637"/>
+                  </a:lnTo>
+                  <a:lnTo>
+                    <a:pt x="3724371" y="2997442"/>
+                  </a:lnTo>
+                  <a:lnTo>
+                    <a:pt x="3652748" y="2966383"/>
+                  </a:lnTo>
+                  <a:lnTo>
+                    <a:pt x="3581126" y="2933340"/>
+                  </a:lnTo>
+                  <a:lnTo>
+                    <a:pt x="3509503" y="2898187"/>
+                  </a:lnTo>
+                  <a:lnTo>
+                    <a:pt x="3437881" y="2860788"/>
+                  </a:lnTo>
+                  <a:lnTo>
+                    <a:pt x="3366258" y="2821001"/>
+                  </a:lnTo>
+                  <a:lnTo>
+                    <a:pt x="3294636" y="2778673"/>
+                  </a:lnTo>
+                  <a:lnTo>
+                    <a:pt x="3223013" y="2733641"/>
+                  </a:lnTo>
+                  <a:lnTo>
+                    <a:pt x="3151391" y="2685734"/>
+                  </a:lnTo>
+                  <a:lnTo>
+                    <a:pt x="3079768" y="2663657"/>
+                  </a:lnTo>
+                  <a:lnTo>
+                    <a:pt x="3008146" y="2688099"/>
+                  </a:lnTo>
+                  <a:lnTo>
+                    <a:pt x="2936523" y="2711812"/>
+                  </a:lnTo>
+                  <a:lnTo>
+                    <a:pt x="2864901" y="2734818"/>
+                  </a:lnTo>
+                  <a:lnTo>
+                    <a:pt x="2793278" y="2757139"/>
+                  </a:lnTo>
+                  <a:lnTo>
+                    <a:pt x="2721655" y="2778794"/>
+                  </a:lnTo>
+                  <a:lnTo>
+                    <a:pt x="2650033" y="2799804"/>
+                  </a:lnTo>
+                  <a:lnTo>
+                    <a:pt x="2578410" y="2820188"/>
+                  </a:lnTo>
+                  <a:lnTo>
+                    <a:pt x="2506788" y="2839964"/>
+                  </a:lnTo>
+                  <a:lnTo>
+                    <a:pt x="2435165" y="2859151"/>
+                  </a:lnTo>
+                  <a:lnTo>
+                    <a:pt x="2363543" y="2877767"/>
+                  </a:lnTo>
+                  <a:lnTo>
+                    <a:pt x="2291920" y="2895827"/>
+                  </a:lnTo>
+                  <a:lnTo>
+                    <a:pt x="2220298" y="2913349"/>
+                  </a:lnTo>
+                  <a:lnTo>
+                    <a:pt x="2148675" y="2930349"/>
+                  </a:lnTo>
+                  <a:lnTo>
+                    <a:pt x="2077053" y="2946842"/>
+                  </a:lnTo>
+                  <a:lnTo>
+                    <a:pt x="2005430" y="2962844"/>
+                  </a:lnTo>
+                  <a:lnTo>
+                    <a:pt x="1933808" y="2978368"/>
+                  </a:lnTo>
+                  <a:lnTo>
+                    <a:pt x="1862185" y="2993430"/>
+                  </a:lnTo>
+                  <a:lnTo>
+                    <a:pt x="1790563" y="3008044"/>
+                  </a:lnTo>
+                  <a:lnTo>
+                    <a:pt x="1718940" y="3022221"/>
+                  </a:lnTo>
+                  <a:lnTo>
+                    <a:pt x="1647318" y="3035976"/>
+                  </a:lnTo>
+                  <a:lnTo>
+                    <a:pt x="1575695" y="3049321"/>
+                  </a:lnTo>
+                  <a:lnTo>
+                    <a:pt x="1504073" y="3062269"/>
+                  </a:lnTo>
+                  <a:lnTo>
+                    <a:pt x="1432450" y="3074830"/>
+                  </a:lnTo>
+                  <a:lnTo>
+                    <a:pt x="1360827" y="3087017"/>
+                  </a:lnTo>
+                  <a:lnTo>
+                    <a:pt x="1289205" y="3098841"/>
+                  </a:lnTo>
+                  <a:lnTo>
+                    <a:pt x="1217582" y="3110313"/>
+                  </a:lnTo>
+                  <a:lnTo>
+                    <a:pt x="1145960" y="3121442"/>
+                  </a:lnTo>
+                  <a:lnTo>
+                    <a:pt x="1074337" y="3132240"/>
+                  </a:lnTo>
+                  <a:lnTo>
+                    <a:pt x="1002715" y="3142716"/>
+                  </a:lnTo>
+                  <a:lnTo>
+                    <a:pt x="931092" y="3152880"/>
+                  </a:lnTo>
+                  <a:lnTo>
+                    <a:pt x="859470" y="3162741"/>
+                  </a:lnTo>
+                  <a:lnTo>
+                    <a:pt x="787847" y="3172308"/>
+                  </a:lnTo>
+                  <a:lnTo>
+                    <a:pt x="716225" y="3181590"/>
+                  </a:lnTo>
+                  <a:lnTo>
+                    <a:pt x="644602" y="3190596"/>
+                  </a:lnTo>
+                  <a:lnTo>
+                    <a:pt x="572980" y="3199333"/>
+                  </a:lnTo>
+                  <a:lnTo>
+                    <a:pt x="501357" y="3207809"/>
+                  </a:lnTo>
+                  <a:lnTo>
+                    <a:pt x="429735" y="3216033"/>
+                  </a:lnTo>
+                  <a:lnTo>
+                    <a:pt x="358112" y="3224012"/>
+                  </a:lnTo>
+                  <a:lnTo>
+                    <a:pt x="286490" y="3231753"/>
+                  </a:lnTo>
+                  <a:lnTo>
+                    <a:pt x="214867" y="3239263"/>
+                  </a:lnTo>
+                  <a:lnTo>
+                    <a:pt x="143245" y="3246550"/>
+                  </a:lnTo>
+                  <a:lnTo>
+                    <a:pt x="71622" y="3253619"/>
+                  </a:lnTo>
+                  <a:lnTo>
+                    <a:pt x="0" y="3260477"/>
                   </a:lnTo>
                   <a:close/>
                 </a:path>
@@ -3942,231 +3939,228 @@
           </p:nvSpPr>
           <p:spPr>
             <a:xfrm>
-              <a:off x="2594060" y="2073503"/>
-              <a:ext cx="5057949" cy="2652450"/>
+              <a:off x="2618886" y="2073503"/>
+              <a:ext cx="5056749" cy="2638465"/>
             </a:xfrm>
             <a:custGeom>
               <a:avLst/>
               <a:pathLst>
-                <a:path w="5057949" h="2652450">
+                <a:path w="5056749" h="2638465">
                   <a:moveTo>
                     <a:pt x="0" y="0"/>
                   </a:moveTo>
                   <a:lnTo>
-                    <a:pt x="10439" y="32122"/>
-                  </a:lnTo>
-                  <a:lnTo>
-                    <a:pt x="82061" y="239287"/>
-                  </a:lnTo>
-                  <a:lnTo>
-                    <a:pt x="153684" y="434018"/>
-                  </a:lnTo>
-                  <a:lnTo>
-                    <a:pt x="225306" y="617062"/>
-                  </a:lnTo>
-                  <a:lnTo>
-                    <a:pt x="296929" y="789119"/>
-                  </a:lnTo>
-                  <a:lnTo>
-                    <a:pt x="368551" y="950849"/>
-                  </a:lnTo>
-                  <a:lnTo>
-                    <a:pt x="440174" y="1102873"/>
-                  </a:lnTo>
-                  <a:lnTo>
-                    <a:pt x="511796" y="1245772"/>
-                  </a:lnTo>
-                  <a:lnTo>
-                    <a:pt x="583419" y="1380094"/>
-                  </a:lnTo>
-                  <a:lnTo>
-                    <a:pt x="655041" y="1506355"/>
-                  </a:lnTo>
-                  <a:lnTo>
-                    <a:pt x="726664" y="1625037"/>
-                  </a:lnTo>
-                  <a:lnTo>
-                    <a:pt x="798286" y="1736596"/>
-                  </a:lnTo>
-                  <a:lnTo>
-                    <a:pt x="869909" y="1841459"/>
-                  </a:lnTo>
-                  <a:lnTo>
-                    <a:pt x="941531" y="1940028"/>
-                  </a:lnTo>
-                  <a:lnTo>
-                    <a:pt x="1013154" y="2032682"/>
-                  </a:lnTo>
-                  <a:lnTo>
-                    <a:pt x="1084776" y="2119774"/>
-                  </a:lnTo>
-                  <a:lnTo>
-                    <a:pt x="1156399" y="2201639"/>
-                  </a:lnTo>
-                  <a:lnTo>
-                    <a:pt x="1228021" y="2278591"/>
-                  </a:lnTo>
-                  <a:lnTo>
-                    <a:pt x="1299644" y="2350924"/>
-                  </a:lnTo>
-                  <a:lnTo>
-                    <a:pt x="1371267" y="2418915"/>
-                  </a:lnTo>
-                  <a:lnTo>
-                    <a:pt x="1442889" y="2482826"/>
-                  </a:lnTo>
-                  <a:lnTo>
-                    <a:pt x="1514512" y="2542901"/>
-                  </a:lnTo>
-                  <a:lnTo>
-                    <a:pt x="1586134" y="2599370"/>
-                  </a:lnTo>
-                  <a:lnTo>
-                    <a:pt x="1657757" y="2652450"/>
-                  </a:lnTo>
-                  <a:lnTo>
-                    <a:pt x="1729379" y="2629731"/>
-                  </a:lnTo>
-                  <a:lnTo>
-                    <a:pt x="1801002" y="2603503"/>
-                  </a:lnTo>
-                  <a:lnTo>
-                    <a:pt x="1872624" y="2576469"/>
-                  </a:lnTo>
-                  <a:lnTo>
-                    <a:pt x="1944247" y="2548605"/>
-                  </a:lnTo>
-                  <a:lnTo>
-                    <a:pt x="2015869" y="2519886"/>
-                  </a:lnTo>
-                  <a:lnTo>
-                    <a:pt x="2087492" y="2490284"/>
-                  </a:lnTo>
-                  <a:lnTo>
-                    <a:pt x="2159114" y="2459773"/>
-                  </a:lnTo>
-                  <a:lnTo>
-                    <a:pt x="2230737" y="2428326"/>
-                  </a:lnTo>
-                  <a:lnTo>
-                    <a:pt x="2302359" y="2395912"/>
-                  </a:lnTo>
-                  <a:lnTo>
-                    <a:pt x="2373982" y="2362503"/>
-                  </a:lnTo>
-                  <a:lnTo>
-                    <a:pt x="2445604" y="2328068"/>
-                  </a:lnTo>
-                  <a:lnTo>
-                    <a:pt x="2517227" y="2292575"/>
-                  </a:lnTo>
-                  <a:lnTo>
-                    <a:pt x="2588849" y="2255993"/>
-                  </a:lnTo>
-                  <a:lnTo>
-                    <a:pt x="2660472" y="2218287"/>
-                  </a:lnTo>
-                  <a:lnTo>
-                    <a:pt x="2732095" y="2179423"/>
-                  </a:lnTo>
-                  <a:lnTo>
-                    <a:pt x="2803717" y="2139365"/>
-                  </a:lnTo>
-                  <a:lnTo>
-                    <a:pt x="2875340" y="2098077"/>
-                  </a:lnTo>
-                  <a:lnTo>
-                    <a:pt x="2946962" y="2055521"/>
-                  </a:lnTo>
-                  <a:lnTo>
-                    <a:pt x="3018585" y="2011658"/>
-                  </a:lnTo>
-                  <a:lnTo>
-                    <a:pt x="3090207" y="1966448"/>
-                  </a:lnTo>
-                  <a:lnTo>
-                    <a:pt x="3161830" y="1919850"/>
-                  </a:lnTo>
-                  <a:lnTo>
-                    <a:pt x="3233452" y="1871820"/>
-                  </a:lnTo>
-                  <a:lnTo>
-                    <a:pt x="3305075" y="1822316"/>
-                  </a:lnTo>
-                  <a:lnTo>
-                    <a:pt x="3376697" y="1771291"/>
-                  </a:lnTo>
-                  <a:lnTo>
-                    <a:pt x="3448320" y="1718699"/>
-                  </a:lnTo>
-                  <a:lnTo>
-                    <a:pt x="3519942" y="1664491"/>
-                  </a:lnTo>
-                  <a:lnTo>
-                    <a:pt x="3591565" y="1608619"/>
-                  </a:lnTo>
-                  <a:lnTo>
-                    <a:pt x="3663187" y="1551032"/>
-                  </a:lnTo>
-                  <a:lnTo>
-                    <a:pt x="3734810" y="1491675"/>
-                  </a:lnTo>
-                  <a:lnTo>
-                    <a:pt x="3806432" y="1430496"/>
-                  </a:lnTo>
-                  <a:lnTo>
-                    <a:pt x="3878055" y="1367437"/>
-                  </a:lnTo>
-                  <a:lnTo>
-                    <a:pt x="3949677" y="1302442"/>
-                  </a:lnTo>
-                  <a:lnTo>
-                    <a:pt x="4021300" y="1235451"/>
-                  </a:lnTo>
-                  <a:lnTo>
-                    <a:pt x="4092922" y="1166403"/>
-                  </a:lnTo>
-                  <a:lnTo>
-                    <a:pt x="4164545" y="1095234"/>
-                  </a:lnTo>
-                  <a:lnTo>
-                    <a:pt x="4236168" y="1021879"/>
-                  </a:lnTo>
-                  <a:lnTo>
-                    <a:pt x="4307790" y="946272"/>
-                  </a:lnTo>
-                  <a:lnTo>
-                    <a:pt x="4379413" y="868342"/>
-                  </a:lnTo>
-                  <a:lnTo>
-                    <a:pt x="4451035" y="788019"/>
-                  </a:lnTo>
-                  <a:lnTo>
-                    <a:pt x="4522658" y="705229"/>
-                  </a:lnTo>
-                  <a:lnTo>
-                    <a:pt x="4594280" y="619897"/>
-                  </a:lnTo>
-                  <a:lnTo>
-                    <a:pt x="4665903" y="531944"/>
-                  </a:lnTo>
-                  <a:lnTo>
-                    <a:pt x="4737525" y="441290"/>
-                  </a:lnTo>
-                  <a:lnTo>
-                    <a:pt x="4809148" y="347852"/>
-                  </a:lnTo>
-                  <a:lnTo>
-                    <a:pt x="4880770" y="251544"/>
-                  </a:lnTo>
-                  <a:lnTo>
-                    <a:pt x="4952393" y="152278"/>
-                  </a:lnTo>
-                  <a:lnTo>
-                    <a:pt x="5024015" y="49964"/>
-                  </a:lnTo>
-                  <a:lnTo>
-                    <a:pt x="5057949" y="0"/>
+                    <a:pt x="57235" y="169172"/>
+                  </a:lnTo>
+                  <a:lnTo>
+                    <a:pt x="128858" y="368158"/>
+                  </a:lnTo>
+                  <a:lnTo>
+                    <a:pt x="200480" y="555198"/>
+                  </a:lnTo>
+                  <a:lnTo>
+                    <a:pt x="272103" y="731010"/>
+                  </a:lnTo>
+                  <a:lnTo>
+                    <a:pt x="343725" y="896267"/>
+                  </a:lnTo>
+                  <a:lnTo>
+                    <a:pt x="415348" y="1051603"/>
+                  </a:lnTo>
+                  <a:lnTo>
+                    <a:pt x="486970" y="1197614"/>
+                  </a:lnTo>
+                  <a:lnTo>
+                    <a:pt x="558593" y="1334859"/>
+                  </a:lnTo>
+                  <a:lnTo>
+                    <a:pt x="630215" y="1463865"/>
+                  </a:lnTo>
+                  <a:lnTo>
+                    <a:pt x="701838" y="1585126"/>
+                  </a:lnTo>
+                  <a:lnTo>
+                    <a:pt x="773461" y="1699107"/>
+                  </a:lnTo>
+                  <a:lnTo>
+                    <a:pt x="845083" y="1806246"/>
+                  </a:lnTo>
+                  <a:lnTo>
+                    <a:pt x="916706" y="1906952"/>
+                  </a:lnTo>
+                  <a:lnTo>
+                    <a:pt x="988328" y="2001613"/>
+                  </a:lnTo>
+                  <a:lnTo>
+                    <a:pt x="1059951" y="2090591"/>
+                  </a:lnTo>
+                  <a:lnTo>
+                    <a:pt x="1131573" y="2174228"/>
+                  </a:lnTo>
+                  <a:lnTo>
+                    <a:pt x="1203196" y="2252843"/>
+                  </a:lnTo>
+                  <a:lnTo>
+                    <a:pt x="1274818" y="2326739"/>
+                  </a:lnTo>
+                  <a:lnTo>
+                    <a:pt x="1346441" y="2396198"/>
+                  </a:lnTo>
+                  <a:lnTo>
+                    <a:pt x="1418063" y="2461488"/>
+                  </a:lnTo>
+                  <a:lnTo>
+                    <a:pt x="1489686" y="2522858"/>
+                  </a:lnTo>
+                  <a:lnTo>
+                    <a:pt x="1561308" y="2580544"/>
+                  </a:lnTo>
+                  <a:lnTo>
+                    <a:pt x="1632931" y="2634766"/>
+                  </a:lnTo>
+                  <a:lnTo>
+                    <a:pt x="1704553" y="2638465"/>
+                  </a:lnTo>
+                  <a:lnTo>
+                    <a:pt x="1776176" y="2612498"/>
+                  </a:lnTo>
+                  <a:lnTo>
+                    <a:pt x="1847798" y="2585734"/>
+                  </a:lnTo>
+                  <a:lnTo>
+                    <a:pt x="1919421" y="2558148"/>
+                  </a:lnTo>
+                  <a:lnTo>
+                    <a:pt x="1991043" y="2529715"/>
+                  </a:lnTo>
+                  <a:lnTo>
+                    <a:pt x="2062666" y="2500408"/>
+                  </a:lnTo>
+                  <a:lnTo>
+                    <a:pt x="2134289" y="2470201"/>
+                  </a:lnTo>
+                  <a:lnTo>
+                    <a:pt x="2205911" y="2439066"/>
+                  </a:lnTo>
+                  <a:lnTo>
+                    <a:pt x="2277534" y="2406974"/>
+                  </a:lnTo>
+                  <a:lnTo>
+                    <a:pt x="2349156" y="2373897"/>
+                  </a:lnTo>
+                  <a:lnTo>
+                    <a:pt x="2420779" y="2339803"/>
+                  </a:lnTo>
+                  <a:lnTo>
+                    <a:pt x="2492401" y="2304662"/>
+                  </a:lnTo>
+                  <a:lnTo>
+                    <a:pt x="2564024" y="2268442"/>
+                  </a:lnTo>
+                  <a:lnTo>
+                    <a:pt x="2635646" y="2231109"/>
+                  </a:lnTo>
+                  <a:lnTo>
+                    <a:pt x="2707269" y="2192629"/>
+                  </a:lnTo>
+                  <a:lnTo>
+                    <a:pt x="2778891" y="2152967"/>
+                  </a:lnTo>
+                  <a:lnTo>
+                    <a:pt x="2850514" y="2112087"/>
+                  </a:lnTo>
+                  <a:lnTo>
+                    <a:pt x="2922136" y="2069951"/>
+                  </a:lnTo>
+                  <a:lnTo>
+                    <a:pt x="2993759" y="2026520"/>
+                  </a:lnTo>
+                  <a:lnTo>
+                    <a:pt x="3065381" y="1981756"/>
+                  </a:lnTo>
+                  <a:lnTo>
+                    <a:pt x="3137004" y="1935616"/>
+                  </a:lnTo>
+                  <a:lnTo>
+                    <a:pt x="3208626" y="1888059"/>
+                  </a:lnTo>
+                  <a:lnTo>
+                    <a:pt x="3280249" y="1839041"/>
+                  </a:lnTo>
+                  <a:lnTo>
+                    <a:pt x="3351871" y="1788517"/>
+                  </a:lnTo>
+                  <a:lnTo>
+                    <a:pt x="3423494" y="1736441"/>
+                  </a:lnTo>
+                  <a:lnTo>
+                    <a:pt x="3495117" y="1682766"/>
+                  </a:lnTo>
+                  <a:lnTo>
+                    <a:pt x="3566739" y="1627442"/>
+                  </a:lnTo>
+                  <a:lnTo>
+                    <a:pt x="3638362" y="1570418"/>
+                  </a:lnTo>
+                  <a:lnTo>
+                    <a:pt x="3709984" y="1511642"/>
+                  </a:lnTo>
+                  <a:lnTo>
+                    <a:pt x="3781607" y="1451061"/>
+                  </a:lnTo>
+                  <a:lnTo>
+                    <a:pt x="3853229" y="1388619"/>
+                  </a:lnTo>
+                  <a:lnTo>
+                    <a:pt x="3924852" y="1324258"/>
+                  </a:lnTo>
+                  <a:lnTo>
+                    <a:pt x="3996474" y="1257921"/>
+                  </a:lnTo>
+                  <a:lnTo>
+                    <a:pt x="4068097" y="1189546"/>
+                  </a:lnTo>
+                  <a:lnTo>
+                    <a:pt x="4139719" y="1119070"/>
+                  </a:lnTo>
+                  <a:lnTo>
+                    <a:pt x="4211342" y="1046429"/>
+                  </a:lnTo>
+                  <a:lnTo>
+                    <a:pt x="4282964" y="971557"/>
+                  </a:lnTo>
+                  <a:lnTo>
+                    <a:pt x="4354587" y="894385"/>
+                  </a:lnTo>
+                  <a:lnTo>
+                    <a:pt x="4426209" y="814843"/>
+                  </a:lnTo>
+                  <a:lnTo>
+                    <a:pt x="4497832" y="732857"/>
+                  </a:lnTo>
+                  <a:lnTo>
+                    <a:pt x="4569454" y="648352"/>
+                  </a:lnTo>
+                  <a:lnTo>
+                    <a:pt x="4641077" y="561251"/>
+                  </a:lnTo>
+                  <a:lnTo>
+                    <a:pt x="4712699" y="471475"/>
+                  </a:lnTo>
+                  <a:lnTo>
+                    <a:pt x="4784322" y="378941"/>
+                  </a:lnTo>
+                  <a:lnTo>
+                    <a:pt x="4855945" y="283564"/>
+                  </a:lnTo>
+                  <a:lnTo>
+                    <a:pt x="4927567" y="185258"/>
+                  </a:lnTo>
+                  <a:lnTo>
+                    <a:pt x="4999190" y="83931"/>
+                  </a:lnTo>
+                  <a:lnTo>
+                    <a:pt x="5056749" y="0"/>
                   </a:lnTo>
                 </a:path>
               </a:pathLst>
@@ -4186,312 +4180,312 @@
           </p:nvSpPr>
           <p:spPr>
             <a:xfrm>
-              <a:off x="1172049" y="4728680"/>
-              <a:ext cx="7090630" cy="802603"/>
+              <a:off x="1172049" y="4737160"/>
+              <a:ext cx="7090630" cy="793593"/>
             </a:xfrm>
             <a:custGeom>
               <a:avLst/>
               <a:pathLst>
-                <a:path w="7090630" h="802603">
+                <a:path w="7090630" h="793593">
                   <a:moveTo>
-                    <a:pt x="7090630" y="802603"/>
+                    <a:pt x="7090630" y="793593"/>
                   </a:moveTo>
                   <a:lnTo>
-                    <a:pt x="7019007" y="800945"/>
-                  </a:lnTo>
-                  <a:lnTo>
-                    <a:pt x="6947385" y="799181"/>
-                  </a:lnTo>
-                  <a:lnTo>
-                    <a:pt x="6875762" y="797304"/>
-                  </a:lnTo>
-                  <a:lnTo>
-                    <a:pt x="6804139" y="795308"/>
-                  </a:lnTo>
-                  <a:lnTo>
-                    <a:pt x="6732517" y="793184"/>
-                  </a:lnTo>
-                  <a:lnTo>
-                    <a:pt x="6660894" y="790925"/>
-                  </a:lnTo>
-                  <a:lnTo>
-                    <a:pt x="6589272" y="788521"/>
-                  </a:lnTo>
-                  <a:lnTo>
-                    <a:pt x="6517649" y="785964"/>
-                  </a:lnTo>
-                  <a:lnTo>
-                    <a:pt x="6446027" y="783244"/>
-                  </a:lnTo>
-                  <a:lnTo>
-                    <a:pt x="6374404" y="780349"/>
-                  </a:lnTo>
-                  <a:lnTo>
-                    <a:pt x="6302782" y="777271"/>
-                  </a:lnTo>
-                  <a:lnTo>
-                    <a:pt x="6231159" y="773995"/>
-                  </a:lnTo>
-                  <a:lnTo>
-                    <a:pt x="6159537" y="770510"/>
-                  </a:lnTo>
-                  <a:lnTo>
-                    <a:pt x="6087914" y="766803"/>
-                  </a:lnTo>
-                  <a:lnTo>
-                    <a:pt x="6016292" y="762859"/>
-                  </a:lnTo>
-                  <a:lnTo>
-                    <a:pt x="5944669" y="758664"/>
-                  </a:lnTo>
-                  <a:lnTo>
-                    <a:pt x="5873047" y="754200"/>
-                  </a:lnTo>
-                  <a:lnTo>
-                    <a:pt x="5801424" y="749452"/>
-                  </a:lnTo>
-                  <a:lnTo>
-                    <a:pt x="5729802" y="744400"/>
-                  </a:lnTo>
-                  <a:lnTo>
-                    <a:pt x="5658179" y="739026"/>
-                  </a:lnTo>
-                  <a:lnTo>
-                    <a:pt x="5586557" y="733308"/>
-                  </a:lnTo>
-                  <a:lnTo>
-                    <a:pt x="5514934" y="727225"/>
-                  </a:lnTo>
-                  <a:lnTo>
-                    <a:pt x="5443311" y="720754"/>
-                  </a:lnTo>
-                  <a:lnTo>
-                    <a:pt x="5371689" y="713870"/>
-                  </a:lnTo>
-                  <a:lnTo>
-                    <a:pt x="5300066" y="706547"/>
-                  </a:lnTo>
-                  <a:lnTo>
-                    <a:pt x="5228444" y="698755"/>
-                  </a:lnTo>
-                  <a:lnTo>
-                    <a:pt x="5156821" y="690466"/>
-                  </a:lnTo>
-                  <a:lnTo>
-                    <a:pt x="5085199" y="681648"/>
-                  </a:lnTo>
-                  <a:lnTo>
-                    <a:pt x="5013576" y="672267"/>
-                  </a:lnTo>
-                  <a:lnTo>
-                    <a:pt x="4941954" y="662287"/>
-                  </a:lnTo>
-                  <a:lnTo>
-                    <a:pt x="4870331" y="651670"/>
-                  </a:lnTo>
-                  <a:lnTo>
-                    <a:pt x="4798709" y="640374"/>
-                  </a:lnTo>
-                  <a:lnTo>
-                    <a:pt x="4727086" y="628358"/>
-                  </a:lnTo>
-                  <a:lnTo>
-                    <a:pt x="4655464" y="615574"/>
-                  </a:lnTo>
-                  <a:lnTo>
-                    <a:pt x="4583841" y="601974"/>
-                  </a:lnTo>
-                  <a:lnTo>
-                    <a:pt x="4512219" y="587505"/>
-                  </a:lnTo>
-                  <a:lnTo>
-                    <a:pt x="4440596" y="572113"/>
-                  </a:lnTo>
-                  <a:lnTo>
-                    <a:pt x="4368974" y="555737"/>
-                  </a:lnTo>
-                  <a:lnTo>
-                    <a:pt x="4297351" y="538317"/>
-                  </a:lnTo>
-                  <a:lnTo>
-                    <a:pt x="4225729" y="519783"/>
-                  </a:lnTo>
-                  <a:lnTo>
-                    <a:pt x="4154106" y="500067"/>
-                  </a:lnTo>
-                  <a:lnTo>
-                    <a:pt x="4082483" y="479091"/>
-                  </a:lnTo>
-                  <a:lnTo>
-                    <a:pt x="4010861" y="456776"/>
-                  </a:lnTo>
-                  <a:lnTo>
-                    <a:pt x="3939238" y="433037"/>
-                  </a:lnTo>
-                  <a:lnTo>
-                    <a:pt x="3867616" y="407781"/>
-                  </a:lnTo>
-                  <a:lnTo>
-                    <a:pt x="3795993" y="380913"/>
-                  </a:lnTo>
-                  <a:lnTo>
-                    <a:pt x="3724371" y="352330"/>
-                  </a:lnTo>
-                  <a:lnTo>
-                    <a:pt x="3652748" y="321921"/>
-                  </a:lnTo>
-                  <a:lnTo>
-                    <a:pt x="3581126" y="289570"/>
-                  </a:lnTo>
-                  <a:lnTo>
-                    <a:pt x="3509503" y="255154"/>
-                  </a:lnTo>
-                  <a:lnTo>
-                    <a:pt x="3437881" y="218540"/>
-                  </a:lnTo>
-                  <a:lnTo>
-                    <a:pt x="3366258" y="179589"/>
-                  </a:lnTo>
-                  <a:lnTo>
-                    <a:pt x="3294636" y="138150"/>
-                  </a:lnTo>
-                  <a:lnTo>
-                    <a:pt x="3223013" y="94066"/>
-                  </a:lnTo>
-                  <a:lnTo>
-                    <a:pt x="3151391" y="47166"/>
+                    <a:pt x="7019007" y="791900"/>
+                  </a:lnTo>
+                  <a:lnTo>
+                    <a:pt x="6947385" y="790100"/>
+                  </a:lnTo>
+                  <a:lnTo>
+                    <a:pt x="6875762" y="788185"/>
+                  </a:lnTo>
+                  <a:lnTo>
+                    <a:pt x="6804139" y="786147"/>
+                  </a:lnTo>
+                  <a:lnTo>
+                    <a:pt x="6732517" y="783979"/>
+                  </a:lnTo>
+                  <a:lnTo>
+                    <a:pt x="6660894" y="781673"/>
+                  </a:lnTo>
+                  <a:lnTo>
+                    <a:pt x="6589272" y="779219"/>
+                  </a:lnTo>
+                  <a:lnTo>
+                    <a:pt x="6517649" y="776609"/>
+                  </a:lnTo>
+                  <a:lnTo>
+                    <a:pt x="6446027" y="773832"/>
+                  </a:lnTo>
+                  <a:lnTo>
+                    <a:pt x="6374404" y="770878"/>
+                  </a:lnTo>
+                  <a:lnTo>
+                    <a:pt x="6302782" y="767735"/>
+                  </a:lnTo>
+                  <a:lnTo>
+                    <a:pt x="6231159" y="764391"/>
+                  </a:lnTo>
+                  <a:lnTo>
+                    <a:pt x="6159537" y="760834"/>
+                  </a:lnTo>
+                  <a:lnTo>
+                    <a:pt x="6087914" y="757049"/>
+                  </a:lnTo>
+                  <a:lnTo>
+                    <a:pt x="6016292" y="753023"/>
+                  </a:lnTo>
+                  <a:lnTo>
+                    <a:pt x="5944669" y="748740"/>
+                  </a:lnTo>
+                  <a:lnTo>
+                    <a:pt x="5873047" y="744183"/>
+                  </a:lnTo>
+                  <a:lnTo>
+                    <a:pt x="5801424" y="739335"/>
+                  </a:lnTo>
+                  <a:lnTo>
+                    <a:pt x="5729802" y="734177"/>
+                  </a:lnTo>
+                  <a:lnTo>
+                    <a:pt x="5658179" y="728690"/>
+                  </a:lnTo>
+                  <a:lnTo>
+                    <a:pt x="5586557" y="722853"/>
+                  </a:lnTo>
+                  <a:lnTo>
+                    <a:pt x="5514934" y="716643"/>
+                  </a:lnTo>
+                  <a:lnTo>
+                    <a:pt x="5443311" y="710036"/>
+                  </a:lnTo>
+                  <a:lnTo>
+                    <a:pt x="5371689" y="703007"/>
+                  </a:lnTo>
+                  <a:lnTo>
+                    <a:pt x="5300066" y="695529"/>
+                  </a:lnTo>
+                  <a:lnTo>
+                    <a:pt x="5228444" y="687574"/>
+                  </a:lnTo>
+                  <a:lnTo>
+                    <a:pt x="5156821" y="679110"/>
+                  </a:lnTo>
+                  <a:lnTo>
+                    <a:pt x="5085199" y="670106"/>
+                  </a:lnTo>
+                  <a:lnTo>
+                    <a:pt x="5013576" y="660527"/>
+                  </a:lnTo>
+                  <a:lnTo>
+                    <a:pt x="4941954" y="650336"/>
+                  </a:lnTo>
+                  <a:lnTo>
+                    <a:pt x="4870331" y="639495"/>
+                  </a:lnTo>
+                  <a:lnTo>
+                    <a:pt x="4798709" y="627960"/>
+                  </a:lnTo>
+                  <a:lnTo>
+                    <a:pt x="4727086" y="615690"/>
+                  </a:lnTo>
+                  <a:lnTo>
+                    <a:pt x="4655464" y="602635"/>
+                  </a:lnTo>
+                  <a:lnTo>
+                    <a:pt x="4583841" y="588747"/>
+                  </a:lnTo>
+                  <a:lnTo>
+                    <a:pt x="4512219" y="573971"/>
+                  </a:lnTo>
+                  <a:lnTo>
+                    <a:pt x="4440596" y="558252"/>
+                  </a:lnTo>
+                  <a:lnTo>
+                    <a:pt x="4368974" y="541529"/>
+                  </a:lnTo>
+                  <a:lnTo>
+                    <a:pt x="4297351" y="523738"/>
+                  </a:lnTo>
+                  <a:lnTo>
+                    <a:pt x="4225729" y="504811"/>
+                  </a:lnTo>
+                  <a:lnTo>
+                    <a:pt x="4154106" y="484675"/>
+                  </a:lnTo>
+                  <a:lnTo>
+                    <a:pt x="4082483" y="463252"/>
+                  </a:lnTo>
+                  <a:lnTo>
+                    <a:pt x="4010861" y="440462"/>
+                  </a:lnTo>
+                  <a:lnTo>
+                    <a:pt x="3939238" y="416216"/>
+                  </a:lnTo>
+                  <a:lnTo>
+                    <a:pt x="3867616" y="390421"/>
+                  </a:lnTo>
+                  <a:lnTo>
+                    <a:pt x="3795993" y="362979"/>
+                  </a:lnTo>
+                  <a:lnTo>
+                    <a:pt x="3724371" y="333785"/>
+                  </a:lnTo>
+                  <a:lnTo>
+                    <a:pt x="3652748" y="302726"/>
+                  </a:lnTo>
+                  <a:lnTo>
+                    <a:pt x="3581126" y="269683"/>
+                  </a:lnTo>
+                  <a:lnTo>
+                    <a:pt x="3509503" y="234529"/>
+                  </a:lnTo>
+                  <a:lnTo>
+                    <a:pt x="3437881" y="197131"/>
+                  </a:lnTo>
+                  <a:lnTo>
+                    <a:pt x="3366258" y="157344"/>
+                  </a:lnTo>
+                  <a:lnTo>
+                    <a:pt x="3294636" y="115015"/>
+                  </a:lnTo>
+                  <a:lnTo>
+                    <a:pt x="3223013" y="69984"/>
+                  </a:lnTo>
+                  <a:lnTo>
+                    <a:pt x="3151391" y="22076"/>
                   </a:lnTo>
                   <a:lnTo>
                     <a:pt x="3079768" y="0"/>
                   </a:lnTo>
                   <a:lnTo>
-                    <a:pt x="3008146" y="24688"/>
-                  </a:lnTo>
-                  <a:lnTo>
-                    <a:pt x="2936523" y="48641"/>
-                  </a:lnTo>
-                  <a:lnTo>
-                    <a:pt x="2864901" y="71880"/>
-                  </a:lnTo>
-                  <a:lnTo>
-                    <a:pt x="2793278" y="94426"/>
-                  </a:lnTo>
-                  <a:lnTo>
-                    <a:pt x="2721655" y="116301"/>
-                  </a:lnTo>
-                  <a:lnTo>
-                    <a:pt x="2650033" y="137524"/>
-                  </a:lnTo>
-                  <a:lnTo>
-                    <a:pt x="2578410" y="158115"/>
-                  </a:lnTo>
-                  <a:lnTo>
-                    <a:pt x="2506788" y="178092"/>
-                  </a:lnTo>
-                  <a:lnTo>
-                    <a:pt x="2435165" y="197474"/>
-                  </a:lnTo>
-                  <a:lnTo>
-                    <a:pt x="2363543" y="216278"/>
-                  </a:lnTo>
-                  <a:lnTo>
-                    <a:pt x="2291920" y="234522"/>
-                  </a:lnTo>
-                  <a:lnTo>
-                    <a:pt x="2220298" y="252222"/>
-                  </a:lnTo>
-                  <a:lnTo>
-                    <a:pt x="2148675" y="269395"/>
-                  </a:lnTo>
-                  <a:lnTo>
-                    <a:pt x="2077053" y="286057"/>
-                  </a:lnTo>
-                  <a:lnTo>
-                    <a:pt x="2005430" y="302222"/>
-                  </a:lnTo>
-                  <a:lnTo>
-                    <a:pt x="1933808" y="317905"/>
-                  </a:lnTo>
-                  <a:lnTo>
-                    <a:pt x="1862185" y="333121"/>
-                  </a:lnTo>
-                  <a:lnTo>
-                    <a:pt x="1790563" y="347883"/>
-                  </a:lnTo>
-                  <a:lnTo>
-                    <a:pt x="1718940" y="362206"/>
-                  </a:lnTo>
-                  <a:lnTo>
-                    <a:pt x="1647318" y="376102"/>
-                  </a:lnTo>
-                  <a:lnTo>
-                    <a:pt x="1575695" y="389584"/>
-                  </a:lnTo>
-                  <a:lnTo>
-                    <a:pt x="1504073" y="402664"/>
-                  </a:lnTo>
-                  <a:lnTo>
-                    <a:pt x="1432450" y="415354"/>
-                  </a:lnTo>
-                  <a:lnTo>
-                    <a:pt x="1360827" y="427667"/>
-                  </a:lnTo>
-                  <a:lnTo>
-                    <a:pt x="1289205" y="439612"/>
-                  </a:lnTo>
-                  <a:lnTo>
-                    <a:pt x="1217582" y="451202"/>
-                  </a:lnTo>
-                  <a:lnTo>
-                    <a:pt x="1145960" y="462446"/>
-                  </a:lnTo>
-                  <a:lnTo>
-                    <a:pt x="1074337" y="473355"/>
-                  </a:lnTo>
-                  <a:lnTo>
-                    <a:pt x="1002715" y="483939"/>
-                  </a:lnTo>
-                  <a:lnTo>
-                    <a:pt x="931092" y="494208"/>
-                  </a:lnTo>
-                  <a:lnTo>
-                    <a:pt x="859470" y="504170"/>
-                  </a:lnTo>
-                  <a:lnTo>
-                    <a:pt x="787847" y="513836"/>
-                  </a:lnTo>
-                  <a:lnTo>
-                    <a:pt x="716225" y="523214"/>
-                  </a:lnTo>
-                  <a:lnTo>
-                    <a:pt x="644602" y="532313"/>
-                  </a:lnTo>
-                  <a:lnTo>
-                    <a:pt x="572980" y="541140"/>
-                  </a:lnTo>
-                  <a:lnTo>
-                    <a:pt x="501357" y="549704"/>
-                  </a:lnTo>
-                  <a:lnTo>
-                    <a:pt x="429735" y="558014"/>
-                  </a:lnTo>
-                  <a:lnTo>
-                    <a:pt x="358112" y="566075"/>
-                  </a:lnTo>
-                  <a:lnTo>
-                    <a:pt x="286490" y="573896"/>
-                  </a:lnTo>
-                  <a:lnTo>
-                    <a:pt x="214867" y="581485"/>
-                  </a:lnTo>
-                  <a:lnTo>
-                    <a:pt x="143245" y="588847"/>
-                  </a:lnTo>
-                  <a:lnTo>
-                    <a:pt x="71622" y="595990"/>
-                  </a:lnTo>
-                  <a:lnTo>
-                    <a:pt x="0" y="602920"/>
+                    <a:pt x="3008146" y="24441"/>
+                  </a:lnTo>
+                  <a:lnTo>
+                    <a:pt x="2936523" y="48154"/>
+                  </a:lnTo>
+                  <a:lnTo>
+                    <a:pt x="2864901" y="71161"/>
+                  </a:lnTo>
+                  <a:lnTo>
+                    <a:pt x="2793278" y="93481"/>
+                  </a:lnTo>
+                  <a:lnTo>
+                    <a:pt x="2721655" y="115137"/>
+                  </a:lnTo>
+                  <a:lnTo>
+                    <a:pt x="2650033" y="136147"/>
+                  </a:lnTo>
+                  <a:lnTo>
+                    <a:pt x="2578410" y="156531"/>
+                  </a:lnTo>
+                  <a:lnTo>
+                    <a:pt x="2506788" y="176307"/>
+                  </a:lnTo>
+                  <a:lnTo>
+                    <a:pt x="2435165" y="195494"/>
+                  </a:lnTo>
+                  <a:lnTo>
+                    <a:pt x="2363543" y="214109"/>
+                  </a:lnTo>
+                  <a:lnTo>
+                    <a:pt x="2291920" y="232169"/>
+                  </a:lnTo>
+                  <a:lnTo>
+                    <a:pt x="2220298" y="249691"/>
+                  </a:lnTo>
+                  <a:lnTo>
+                    <a:pt x="2148675" y="266691"/>
+                  </a:lnTo>
+                  <a:lnTo>
+                    <a:pt x="2077053" y="283184"/>
+                  </a:lnTo>
+                  <a:lnTo>
+                    <a:pt x="2005430" y="299186"/>
+                  </a:lnTo>
+                  <a:lnTo>
+                    <a:pt x="1933808" y="314711"/>
+                  </a:lnTo>
+                  <a:lnTo>
+                    <a:pt x="1862185" y="329773"/>
+                  </a:lnTo>
+                  <a:lnTo>
+                    <a:pt x="1790563" y="344386"/>
+                  </a:lnTo>
+                  <a:lnTo>
+                    <a:pt x="1718940" y="358564"/>
+                  </a:lnTo>
+                  <a:lnTo>
+                    <a:pt x="1647318" y="372319"/>
+                  </a:lnTo>
+                  <a:lnTo>
+                    <a:pt x="1575695" y="385664"/>
+                  </a:lnTo>
+                  <a:lnTo>
+                    <a:pt x="1504073" y="398611"/>
+                  </a:lnTo>
+                  <a:lnTo>
+                    <a:pt x="1432450" y="411173"/>
+                  </a:lnTo>
+                  <a:lnTo>
+                    <a:pt x="1360827" y="423360"/>
+                  </a:lnTo>
+                  <a:lnTo>
+                    <a:pt x="1289205" y="435184"/>
+                  </a:lnTo>
+                  <a:lnTo>
+                    <a:pt x="1217582" y="446655"/>
+                  </a:lnTo>
+                  <a:lnTo>
+                    <a:pt x="1145960" y="457785"/>
+                  </a:lnTo>
+                  <a:lnTo>
+                    <a:pt x="1074337" y="468583"/>
+                  </a:lnTo>
+                  <a:lnTo>
+                    <a:pt x="1002715" y="479059"/>
+                  </a:lnTo>
+                  <a:lnTo>
+                    <a:pt x="931092" y="489223"/>
+                  </a:lnTo>
+                  <a:lnTo>
+                    <a:pt x="859470" y="499084"/>
+                  </a:lnTo>
+                  <a:lnTo>
+                    <a:pt x="787847" y="508651"/>
+                  </a:lnTo>
+                  <a:lnTo>
+                    <a:pt x="716225" y="517933"/>
+                  </a:lnTo>
+                  <a:lnTo>
+                    <a:pt x="644602" y="526938"/>
+                  </a:lnTo>
+                  <a:lnTo>
+                    <a:pt x="572980" y="535675"/>
+                  </a:lnTo>
+                  <a:lnTo>
+                    <a:pt x="501357" y="544152"/>
+                  </a:lnTo>
+                  <a:lnTo>
+                    <a:pt x="429735" y="552376"/>
+                  </a:lnTo>
+                  <a:lnTo>
+                    <a:pt x="358112" y="560354"/>
+                  </a:lnTo>
+                  <a:lnTo>
+                    <a:pt x="286490" y="568095"/>
+                  </a:lnTo>
+                  <a:lnTo>
+                    <a:pt x="214867" y="575606"/>
+                  </a:lnTo>
+                  <a:lnTo>
+                    <a:pt x="143245" y="582892"/>
+                  </a:lnTo>
+                  <a:lnTo>
+                    <a:pt x="71622" y="589961"/>
+                  </a:lnTo>
+                  <a:lnTo>
+                    <a:pt x="0" y="596820"/>
                   </a:lnTo>
                 </a:path>
               </a:pathLst>
@@ -4511,312 +4505,312 @@
           </p:nvSpPr>
           <p:spPr>
             <a:xfrm>
-              <a:off x="1172049" y="3918395"/>
-              <a:ext cx="7090630" cy="1296711"/>
+              <a:off x="1172049" y="3909279"/>
+              <a:ext cx="7090630" cy="1304054"/>
             </a:xfrm>
             <a:custGeom>
               <a:avLst/>
               <a:pathLst>
-                <a:path w="7090630" h="1296711">
+                <a:path w="7090630" h="1304054">
                   <a:moveTo>
                     <a:pt x="0" y="0"/>
                   </a:moveTo>
                   <a:lnTo>
-                    <a:pt x="71622" y="25728"/>
-                  </a:lnTo>
-                  <a:lnTo>
-                    <a:pt x="143245" y="51052"/>
-                  </a:lnTo>
-                  <a:lnTo>
-                    <a:pt x="214867" y="75979"/>
-                  </a:lnTo>
-                  <a:lnTo>
-                    <a:pt x="286490" y="100514"/>
-                  </a:lnTo>
-                  <a:lnTo>
-                    <a:pt x="358112" y="124665"/>
-                  </a:lnTo>
-                  <a:lnTo>
-                    <a:pt x="429735" y="148436"/>
-                  </a:lnTo>
-                  <a:lnTo>
-                    <a:pt x="501357" y="171834"/>
-                  </a:lnTo>
-                  <a:lnTo>
-                    <a:pt x="572980" y="194865"/>
-                  </a:lnTo>
-                  <a:lnTo>
-                    <a:pt x="644602" y="217534"/>
-                  </a:lnTo>
-                  <a:lnTo>
-                    <a:pt x="716225" y="239847"/>
-                  </a:lnTo>
-                  <a:lnTo>
-                    <a:pt x="787847" y="261810"/>
-                  </a:lnTo>
-                  <a:lnTo>
-                    <a:pt x="859470" y="283428"/>
-                  </a:lnTo>
-                  <a:lnTo>
-                    <a:pt x="931092" y="304707"/>
-                  </a:lnTo>
-                  <a:lnTo>
-                    <a:pt x="1002715" y="325651"/>
-                  </a:lnTo>
-                  <a:lnTo>
-                    <a:pt x="1074337" y="346267"/>
-                  </a:lnTo>
-                  <a:lnTo>
-                    <a:pt x="1145960" y="366559"/>
-                  </a:lnTo>
-                  <a:lnTo>
-                    <a:pt x="1217582" y="386533"/>
-                  </a:lnTo>
-                  <a:lnTo>
-                    <a:pt x="1289205" y="406193"/>
-                  </a:lnTo>
-                  <a:lnTo>
-                    <a:pt x="1360827" y="425545"/>
-                  </a:lnTo>
-                  <a:lnTo>
-                    <a:pt x="1432450" y="444592"/>
-                  </a:lnTo>
-                  <a:lnTo>
-                    <a:pt x="1504073" y="463341"/>
-                  </a:lnTo>
-                  <a:lnTo>
-                    <a:pt x="1575695" y="481795"/>
-                  </a:lnTo>
-                  <a:lnTo>
-                    <a:pt x="1647318" y="499960"/>
-                  </a:lnTo>
-                  <a:lnTo>
-                    <a:pt x="1718940" y="517839"/>
-                  </a:lnTo>
-                  <a:lnTo>
-                    <a:pt x="1790563" y="535438"/>
-                  </a:lnTo>
-                  <a:lnTo>
-                    <a:pt x="1862185" y="552761"/>
-                  </a:lnTo>
-                  <a:lnTo>
-                    <a:pt x="1933808" y="569811"/>
-                  </a:lnTo>
-                  <a:lnTo>
-                    <a:pt x="2005430" y="586594"/>
-                  </a:lnTo>
-                  <a:lnTo>
-                    <a:pt x="2077053" y="603113"/>
-                  </a:lnTo>
-                  <a:lnTo>
-                    <a:pt x="2148675" y="619373"/>
-                  </a:lnTo>
-                  <a:lnTo>
-                    <a:pt x="2220298" y="635378"/>
-                  </a:lnTo>
-                  <a:lnTo>
-                    <a:pt x="2291920" y="651132"/>
-                  </a:lnTo>
-                  <a:lnTo>
-                    <a:pt x="2363543" y="666638"/>
-                  </a:lnTo>
-                  <a:lnTo>
-                    <a:pt x="2435165" y="681901"/>
-                  </a:lnTo>
-                  <a:lnTo>
-                    <a:pt x="2506788" y="696924"/>
-                  </a:lnTo>
-                  <a:lnTo>
-                    <a:pt x="2578410" y="711711"/>
-                  </a:lnTo>
-                  <a:lnTo>
-                    <a:pt x="2650033" y="726266"/>
-                  </a:lnTo>
-                  <a:lnTo>
-                    <a:pt x="2721655" y="740593"/>
-                  </a:lnTo>
-                  <a:lnTo>
-                    <a:pt x="2793278" y="754695"/>
-                  </a:lnTo>
-                  <a:lnTo>
-                    <a:pt x="2864901" y="768575"/>
-                  </a:lnTo>
-                  <a:lnTo>
-                    <a:pt x="2936523" y="782237"/>
-                  </a:lnTo>
-                  <a:lnTo>
-                    <a:pt x="3008146" y="795685"/>
-                  </a:lnTo>
-                  <a:lnTo>
-                    <a:pt x="3079768" y="808922"/>
-                  </a:lnTo>
-                  <a:lnTo>
-                    <a:pt x="3151391" y="821951"/>
-                  </a:lnTo>
-                  <a:lnTo>
-                    <a:pt x="3223013" y="834776"/>
-                  </a:lnTo>
-                  <a:lnTo>
-                    <a:pt x="3294636" y="847399"/>
-                  </a:lnTo>
-                  <a:lnTo>
-                    <a:pt x="3366258" y="859824"/>
-                  </a:lnTo>
-                  <a:lnTo>
-                    <a:pt x="3437881" y="872054"/>
-                  </a:lnTo>
-                  <a:lnTo>
-                    <a:pt x="3509503" y="884092"/>
-                  </a:lnTo>
-                  <a:lnTo>
-                    <a:pt x="3581126" y="895941"/>
-                  </a:lnTo>
-                  <a:lnTo>
-                    <a:pt x="3652748" y="907604"/>
-                  </a:lnTo>
-                  <a:lnTo>
-                    <a:pt x="3724371" y="919084"/>
-                  </a:lnTo>
-                  <a:lnTo>
-                    <a:pt x="3795993" y="930383"/>
-                  </a:lnTo>
-                  <a:lnTo>
-                    <a:pt x="3867616" y="941505"/>
-                  </a:lnTo>
-                  <a:lnTo>
-                    <a:pt x="3939238" y="952453"/>
-                  </a:lnTo>
-                  <a:lnTo>
-                    <a:pt x="4010861" y="963229"/>
-                  </a:lnTo>
-                  <a:lnTo>
-                    <a:pt x="4082483" y="973835"/>
-                  </a:lnTo>
-                  <a:lnTo>
-                    <a:pt x="4154106" y="984276"/>
-                  </a:lnTo>
-                  <a:lnTo>
-                    <a:pt x="4225729" y="994552"/>
-                  </a:lnTo>
-                  <a:lnTo>
-                    <a:pt x="4297351" y="1004667"/>
-                  </a:lnTo>
-                  <a:lnTo>
-                    <a:pt x="4368974" y="1014623"/>
-                  </a:lnTo>
-                  <a:lnTo>
-                    <a:pt x="4440596" y="1024422"/>
-                  </a:lnTo>
-                  <a:lnTo>
-                    <a:pt x="4512219" y="1034068"/>
-                  </a:lnTo>
-                  <a:lnTo>
-                    <a:pt x="4583841" y="1043563"/>
-                  </a:lnTo>
-                  <a:lnTo>
-                    <a:pt x="4655464" y="1052908"/>
-                  </a:lnTo>
-                  <a:lnTo>
-                    <a:pt x="4727086" y="1062107"/>
-                  </a:lnTo>
-                  <a:lnTo>
-                    <a:pt x="4798709" y="1071161"/>
-                  </a:lnTo>
-                  <a:lnTo>
-                    <a:pt x="4870331" y="1080073"/>
-                  </a:lnTo>
-                  <a:lnTo>
-                    <a:pt x="4941954" y="1088846"/>
-                  </a:lnTo>
-                  <a:lnTo>
-                    <a:pt x="5013576" y="1097480"/>
-                  </a:lnTo>
-                  <a:lnTo>
-                    <a:pt x="5085199" y="1105979"/>
-                  </a:lnTo>
-                  <a:lnTo>
-                    <a:pt x="5156821" y="1114345"/>
-                  </a:lnTo>
-                  <a:lnTo>
-                    <a:pt x="5228444" y="1122579"/>
-                  </a:lnTo>
-                  <a:lnTo>
-                    <a:pt x="5300066" y="1130684"/>
-                  </a:lnTo>
-                  <a:lnTo>
-                    <a:pt x="5371689" y="1138662"/>
-                  </a:lnTo>
-                  <a:lnTo>
-                    <a:pt x="5443311" y="1146514"/>
-                  </a:lnTo>
-                  <a:lnTo>
-                    <a:pt x="5514934" y="1154243"/>
-                  </a:lnTo>
-                  <a:lnTo>
-                    <a:pt x="5586557" y="1161851"/>
-                  </a:lnTo>
-                  <a:lnTo>
-                    <a:pt x="5658179" y="1169340"/>
-                  </a:lnTo>
-                  <a:lnTo>
-                    <a:pt x="5729802" y="1176711"/>
-                  </a:lnTo>
-                  <a:lnTo>
-                    <a:pt x="5801424" y="1183966"/>
-                  </a:lnTo>
-                  <a:lnTo>
-                    <a:pt x="5873047" y="1191107"/>
-                  </a:lnTo>
-                  <a:lnTo>
-                    <a:pt x="5944669" y="1198136"/>
-                  </a:lnTo>
-                  <a:lnTo>
-                    <a:pt x="6016292" y="1205055"/>
-                  </a:lnTo>
-                  <a:lnTo>
-                    <a:pt x="6087914" y="1211865"/>
-                  </a:lnTo>
-                  <a:lnTo>
-                    <a:pt x="6159537" y="1218568"/>
-                  </a:lnTo>
-                  <a:lnTo>
-                    <a:pt x="6231159" y="1225167"/>
-                  </a:lnTo>
-                  <a:lnTo>
-                    <a:pt x="6302782" y="1231661"/>
-                  </a:lnTo>
-                  <a:lnTo>
-                    <a:pt x="6374404" y="1238053"/>
-                  </a:lnTo>
-                  <a:lnTo>
-                    <a:pt x="6446027" y="1244346"/>
-                  </a:lnTo>
-                  <a:lnTo>
-                    <a:pt x="6517649" y="1250539"/>
-                  </a:lnTo>
-                  <a:lnTo>
-                    <a:pt x="6589272" y="1256635"/>
-                  </a:lnTo>
-                  <a:lnTo>
-                    <a:pt x="6660894" y="1262636"/>
-                  </a:lnTo>
-                  <a:lnTo>
-                    <a:pt x="6732517" y="1268542"/>
-                  </a:lnTo>
-                  <a:lnTo>
-                    <a:pt x="6804139" y="1274355"/>
-                  </a:lnTo>
-                  <a:lnTo>
-                    <a:pt x="6875762" y="1280078"/>
-                  </a:lnTo>
-                  <a:lnTo>
-                    <a:pt x="6947385" y="1285710"/>
-                  </a:lnTo>
-                  <a:lnTo>
-                    <a:pt x="7019007" y="1291254"/>
-                  </a:lnTo>
-                  <a:lnTo>
-                    <a:pt x="7090630" y="1296711"/>
+                    <a:pt x="71622" y="25877"/>
+                  </a:lnTo>
+                  <a:lnTo>
+                    <a:pt x="143245" y="51348"/>
+                  </a:lnTo>
+                  <a:lnTo>
+                    <a:pt x="214867" y="76420"/>
+                  </a:lnTo>
+                  <a:lnTo>
+                    <a:pt x="286490" y="101097"/>
+                  </a:lnTo>
+                  <a:lnTo>
+                    <a:pt x="358112" y="125387"/>
+                  </a:lnTo>
+                  <a:lnTo>
+                    <a:pt x="429735" y="149296"/>
+                  </a:lnTo>
+                  <a:lnTo>
+                    <a:pt x="501357" y="172829"/>
+                  </a:lnTo>
+                  <a:lnTo>
+                    <a:pt x="572980" y="195993"/>
+                  </a:lnTo>
+                  <a:lnTo>
+                    <a:pt x="644602" y="218793"/>
+                  </a:lnTo>
+                  <a:lnTo>
+                    <a:pt x="716225" y="241235"/>
+                  </a:lnTo>
+                  <a:lnTo>
+                    <a:pt x="787847" y="263325"/>
+                  </a:lnTo>
+                  <a:lnTo>
+                    <a:pt x="859470" y="285067"/>
+                  </a:lnTo>
+                  <a:lnTo>
+                    <a:pt x="931092" y="306469"/>
+                  </a:lnTo>
+                  <a:lnTo>
+                    <a:pt x="1002715" y="327534"/>
+                  </a:lnTo>
+                  <a:lnTo>
+                    <a:pt x="1074337" y="348268"/>
+                  </a:lnTo>
+                  <a:lnTo>
+                    <a:pt x="1145960" y="368677"/>
+                  </a:lnTo>
+                  <a:lnTo>
+                    <a:pt x="1217582" y="388766"/>
+                  </a:lnTo>
+                  <a:lnTo>
+                    <a:pt x="1289205" y="408538"/>
+                  </a:lnTo>
+                  <a:lnTo>
+                    <a:pt x="1360827" y="428001"/>
+                  </a:lnTo>
+                  <a:lnTo>
+                    <a:pt x="1432450" y="447158"/>
+                  </a:lnTo>
+                  <a:lnTo>
+                    <a:pt x="1504073" y="466014"/>
+                  </a:lnTo>
+                  <a:lnTo>
+                    <a:pt x="1575695" y="484574"/>
+                  </a:lnTo>
+                  <a:lnTo>
+                    <a:pt x="1647318" y="502842"/>
+                  </a:lnTo>
+                  <a:lnTo>
+                    <a:pt x="1718940" y="520824"/>
+                  </a:lnTo>
+                  <a:lnTo>
+                    <a:pt x="1790563" y="538523"/>
+                  </a:lnTo>
+                  <a:lnTo>
+                    <a:pt x="1862185" y="555944"/>
+                  </a:lnTo>
+                  <a:lnTo>
+                    <a:pt x="1933808" y="573092"/>
+                  </a:lnTo>
+                  <a:lnTo>
+                    <a:pt x="2005430" y="589971"/>
+                  </a:lnTo>
+                  <a:lnTo>
+                    <a:pt x="2077053" y="606584"/>
+                  </a:lnTo>
+                  <a:lnTo>
+                    <a:pt x="2148675" y="622937"/>
+                  </a:lnTo>
+                  <a:lnTo>
+                    <a:pt x="2220298" y="639033"/>
+                  </a:lnTo>
+                  <a:lnTo>
+                    <a:pt x="2291920" y="654876"/>
+                  </a:lnTo>
+                  <a:lnTo>
+                    <a:pt x="2363543" y="670470"/>
+                  </a:lnTo>
+                  <a:lnTo>
+                    <a:pt x="2435165" y="685819"/>
+                  </a:lnTo>
+                  <a:lnTo>
+                    <a:pt x="2506788" y="700928"/>
+                  </a:lnTo>
+                  <a:lnTo>
+                    <a:pt x="2578410" y="715799"/>
+                  </a:lnTo>
+                  <a:lnTo>
+                    <a:pt x="2650033" y="730436"/>
+                  </a:lnTo>
+                  <a:lnTo>
+                    <a:pt x="2721655" y="744844"/>
+                  </a:lnTo>
+                  <a:lnTo>
+                    <a:pt x="2793278" y="759026"/>
+                  </a:lnTo>
+                  <a:lnTo>
+                    <a:pt x="2864901" y="772985"/>
+                  </a:lnTo>
+                  <a:lnTo>
+                    <a:pt x="2936523" y="786724"/>
+                  </a:lnTo>
+                  <a:lnTo>
+                    <a:pt x="3008146" y="800248"/>
+                  </a:lnTo>
+                  <a:lnTo>
+                    <a:pt x="3079768" y="813560"/>
+                  </a:lnTo>
+                  <a:lnTo>
+                    <a:pt x="3151391" y="826662"/>
+                  </a:lnTo>
+                  <a:lnTo>
+                    <a:pt x="3223013" y="839559"/>
+                  </a:lnTo>
+                  <a:lnTo>
+                    <a:pt x="3294636" y="852253"/>
+                  </a:lnTo>
+                  <a:lnTo>
+                    <a:pt x="3366258" y="864748"/>
+                  </a:lnTo>
+                  <a:lnTo>
+                    <a:pt x="3437881" y="877047"/>
+                  </a:lnTo>
+                  <a:lnTo>
+                    <a:pt x="3509503" y="889152"/>
+                  </a:lnTo>
+                  <a:lnTo>
+                    <a:pt x="3581126" y="901068"/>
+                  </a:lnTo>
+                  <a:lnTo>
+                    <a:pt x="3652748" y="912796"/>
+                  </a:lnTo>
+                  <a:lnTo>
+                    <a:pt x="3724371" y="924341"/>
+                  </a:lnTo>
+                  <a:lnTo>
+                    <a:pt x="3795993" y="935704"/>
+                  </a:lnTo>
+                  <a:lnTo>
+                    <a:pt x="3867616" y="946888"/>
+                  </a:lnTo>
+                  <a:lnTo>
+                    <a:pt x="3939238" y="957897"/>
+                  </a:lnTo>
+                  <a:lnTo>
+                    <a:pt x="4010861" y="968733"/>
+                  </a:lnTo>
+                  <a:lnTo>
+                    <a:pt x="4082483" y="979399"/>
+                  </a:lnTo>
+                  <a:lnTo>
+                    <a:pt x="4154106" y="989897"/>
+                  </a:lnTo>
+                  <a:lnTo>
+                    <a:pt x="4225729" y="1000231"/>
+                  </a:lnTo>
+                  <a:lnTo>
+                    <a:pt x="4297351" y="1010402"/>
+                  </a:lnTo>
+                  <a:lnTo>
+                    <a:pt x="4368974" y="1020414"/>
+                  </a:lnTo>
+                  <a:lnTo>
+                    <a:pt x="4440596" y="1030268"/>
+                  </a:lnTo>
+                  <a:lnTo>
+                    <a:pt x="4512219" y="1039967"/>
+                  </a:lnTo>
+                  <a:lnTo>
+                    <a:pt x="4583841" y="1049515"/>
+                  </a:lnTo>
+                  <a:lnTo>
+                    <a:pt x="4655464" y="1058912"/>
+                  </a:lnTo>
+                  <a:lnTo>
+                    <a:pt x="4727086" y="1068162"/>
+                  </a:lnTo>
+                  <a:lnTo>
+                    <a:pt x="4798709" y="1077267"/>
+                  </a:lnTo>
+                  <a:lnTo>
+                    <a:pt x="4870331" y="1086228"/>
+                  </a:lnTo>
+                  <a:lnTo>
+                    <a:pt x="4941954" y="1095049"/>
+                  </a:lnTo>
+                  <a:lnTo>
+                    <a:pt x="5013576" y="1103731"/>
+                  </a:lnTo>
+                  <a:lnTo>
+                    <a:pt x="5085199" y="1112277"/>
+                  </a:lnTo>
+                  <a:lnTo>
+                    <a:pt x="5156821" y="1120689"/>
+                  </a:lnTo>
+                  <a:lnTo>
+                    <a:pt x="5228444" y="1128969"/>
+                  </a:lnTo>
+                  <a:lnTo>
+                    <a:pt x="5300066" y="1137119"/>
+                  </a:lnTo>
+                  <a:lnTo>
+                    <a:pt x="5371689" y="1145140"/>
+                  </a:lnTo>
+                  <a:lnTo>
+                    <a:pt x="5443311" y="1153036"/>
+                  </a:lnTo>
+                  <a:lnTo>
+                    <a:pt x="5514934" y="1160808"/>
+                  </a:lnTo>
+                  <a:lnTo>
+                    <a:pt x="5586557" y="1168458"/>
+                  </a:lnTo>
+                  <a:lnTo>
+                    <a:pt x="5658179" y="1175987"/>
+                  </a:lnTo>
+                  <a:lnTo>
+                    <a:pt x="5729802" y="1183399"/>
+                  </a:lnTo>
+                  <a:lnTo>
+                    <a:pt x="5801424" y="1190694"/>
+                  </a:lnTo>
+                  <a:lnTo>
+                    <a:pt x="5873047" y="1197874"/>
+                  </a:lnTo>
+                  <a:lnTo>
+                    <a:pt x="5944669" y="1204942"/>
+                  </a:lnTo>
+                  <a:lnTo>
+                    <a:pt x="6016292" y="1211899"/>
+                  </a:lnTo>
+                  <a:lnTo>
+                    <a:pt x="6087914" y="1218746"/>
+                  </a:lnTo>
+                  <a:lnTo>
+                    <a:pt x="6159537" y="1225486"/>
+                  </a:lnTo>
+                  <a:lnTo>
+                    <a:pt x="6231159" y="1232120"/>
+                  </a:lnTo>
+                  <a:lnTo>
+                    <a:pt x="6302782" y="1238650"/>
+                  </a:lnTo>
+                  <a:lnTo>
+                    <a:pt x="6374404" y="1245078"/>
+                  </a:lnTo>
+                  <a:lnTo>
+                    <a:pt x="6446027" y="1251404"/>
+                  </a:lnTo>
+                  <a:lnTo>
+                    <a:pt x="6517649" y="1257631"/>
+                  </a:lnTo>
+                  <a:lnTo>
+                    <a:pt x="6589272" y="1263761"/>
+                  </a:lnTo>
+                  <a:lnTo>
+                    <a:pt x="6660894" y="1269794"/>
+                  </a:lnTo>
+                  <a:lnTo>
+                    <a:pt x="6732517" y="1275732"/>
+                  </a:lnTo>
+                  <a:lnTo>
+                    <a:pt x="6804139" y="1281577"/>
+                  </a:lnTo>
+                  <a:lnTo>
+                    <a:pt x="6875762" y="1287331"/>
+                  </a:lnTo>
+                  <a:lnTo>
+                    <a:pt x="6947385" y="1292994"/>
+                  </a:lnTo>
+                  <a:lnTo>
+                    <a:pt x="7019007" y="1298568"/>
+                  </a:lnTo>
+                  <a:lnTo>
+                    <a:pt x="7090630" y="1304054"/>
                   </a:lnTo>
                 </a:path>
               </a:pathLst>
@@ -4888,7 +4882,7 @@
           </p:nvSpPr>
           <p:spPr>
             <a:xfrm>
-              <a:off x="4254372" y="2073503"/>
+              <a:off x="4278722" y="2073503"/>
               <a:ext cx="0" cy="3649639"/>
             </a:xfrm>
             <a:custGeom>
@@ -5161,7 +5155,7 @@
           </p:nvSpPr>
           <p:spPr>
             <a:xfrm>
-              <a:off x="1347083" y="5785772"/>
+              <a:off x="1347751" y="5785772"/>
               <a:ext cx="161574" cy="80101"/>
             </a:xfrm>
             <a:prstGeom prst="rect">
@@ -5207,7 +5201,7 @@
           </p:nvSpPr>
           <p:spPr>
             <a:xfrm>
-              <a:off x="2254916" y="5785772"/>
+              <a:off x="2255364" y="5785772"/>
               <a:ext cx="161574" cy="80101"/>
             </a:xfrm>
             <a:prstGeom prst="rect">
@@ -5253,7 +5247,7 @@
           </p:nvSpPr>
           <p:spPr>
             <a:xfrm>
-              <a:off x="3162750" y="5785772"/>
+              <a:off x="3162976" y="5785772"/>
               <a:ext cx="161574" cy="80101"/>
             </a:xfrm>
             <a:prstGeom prst="rect">
@@ -5299,7 +5293,7 @@
           </p:nvSpPr>
           <p:spPr>
             <a:xfrm>
-              <a:off x="4120281" y="5785772"/>
+              <a:off x="4120286" y="5785772"/>
               <a:ext cx="62179" cy="80101"/>
             </a:xfrm>
             <a:prstGeom prst="rect">
@@ -5345,7 +5339,7 @@
           </p:nvSpPr>
           <p:spPr>
             <a:xfrm>
-              <a:off x="4997024" y="5785772"/>
+              <a:off x="4996809" y="5785772"/>
               <a:ext cx="124358" cy="80101"/>
             </a:xfrm>
             <a:prstGeom prst="rect">
@@ -5391,7 +5385,7 @@
           </p:nvSpPr>
           <p:spPr>
             <a:xfrm>
-              <a:off x="5904858" y="5785772"/>
+              <a:off x="5904422" y="5785772"/>
               <a:ext cx="124358" cy="80101"/>
             </a:xfrm>
             <a:prstGeom prst="rect">
@@ -5437,7 +5431,7 @@
           </p:nvSpPr>
           <p:spPr>
             <a:xfrm>
-              <a:off x="6812691" y="5785772"/>
+              <a:off x="6812034" y="5785772"/>
               <a:ext cx="124358" cy="80101"/>
             </a:xfrm>
             <a:prstGeom prst="rect">
@@ -5483,7 +5477,7 @@
           </p:nvSpPr>
           <p:spPr>
             <a:xfrm>
-              <a:off x="7720525" y="5785772"/>
+              <a:off x="7719647" y="5785772"/>
               <a:ext cx="124358" cy="80101"/>
             </a:xfrm>
             <a:prstGeom prst="rect">
@@ -5654,7 +5648,7 @@
                   <a:latin typeface="Helvetica"/>
                   <a:cs typeface="Helvetica"/>
                 </a:rPr>
-                <a:t>subHR per 10 % decline: 1.22 (0.68-2.19), p = 0.501  |  per IQR decline (Δ = 26.4 %): 1.70 (0.36-7.96)  |  IQR: [-11.1, 15.3] %</a:t>
+                <a:t>subHR per 10 % decline: 1.22 (0.68-2.19), p = 0.501  |  per IQR decline (Δ = 26.4 %): 1.70 (0.36-7.94)  |  IQR: [-11.1, 15.4] %</a:t>
               </a:r>
             </a:p>
           </p:txBody>
